--- a/project_29_sign_language/presentations/project_presentation.pptx
+++ b/project_29_sign_language/presentations/project_presentation.pptx
@@ -13,6 +13,13 @@
     <p:sldId id="261" r:id="rId12"/>
     <p:sldId id="262" r:id="rId13"/>
     <p:sldId id="263" r:id="rId14"/>
+    <p:sldId id="264" r:id="rId15"/>
+    <p:sldId id="265" r:id="rId16"/>
+    <p:sldId id="266" r:id="rId17"/>
+    <p:sldId id="267" r:id="rId18"/>
+    <p:sldId id="268" r:id="rId19"/>
+    <p:sldId id="269" r:id="rId20"/>
+    <p:sldId id="270" r:id="rId21"/>
   </p:sldIdLst>
   <p:sldSz cx="12191695" cy="6858000" type="screen4x3"/>
   <p:notesSz cx="6858000" cy="9144000"/>
@@ -3110,7 +3117,7 @@
             <a:avLst/>
           </a:prstGeom>
           <a:solidFill>
-            <a:srgbClr val="0F172A"/>
+            <a:srgbClr val="070D18"/>
           </a:solidFill>
           <a:ln>
             <a:noFill/>
@@ -3146,8 +3153,8 @@
         </p:nvSpPr>
         <p:spPr>
           <a:xfrm>
-            <a:off x="1097280" y="1645920"/>
-            <a:ext cx="10058400" cy="3474720"/>
+            <a:off x="914400" y="1645920"/>
+            <a:ext cx="10332720" cy="3474720"/>
           </a:xfrm>
           <a:prstGeom prst="rect">
             <a:avLst/>
@@ -3161,44 +3168,2011 @@
           <a:lstStyle/>
           <a:p>
             <a:pPr>
+              <a:defRPr sz="1200" b="1">
+                <a:solidFill>
+                  <a:srgbClr val="06B6D4"/>
+                </a:solidFill>
+              </a:defRPr>
+            </a:pPr>
+            <a:r>
+              <a:t>COLLEGE CAPSTONE ENGINEERING PORTFOLIO • PROJECT 29</a:t>
+            </a:r>
+          </a:p>
+          <a:p>
+            <a:pPr>
+              <a:defRPr sz="3000" b="1">
+                <a:solidFill>
+                  <a:srgbClr val="F8FAFC"/>
+                </a:solidFill>
+              </a:defRPr>
+            </a:pPr>
+            <a:r>
+              <a:t>AI-Based Sign Language Translation with Real-Time Speech and Text Generation</a:t>
+            </a:r>
+          </a:p>
+          <a:p>
+            <a:pPr>
+              <a:defRPr sz="1600">
+                <a:solidFill>
+                  <a:srgbClr val="8B5CF6"/>
+                </a:solidFill>
+              </a:defRPr>
+            </a:pPr>
+            <a:r>
+              <a:t>Deep Residual MediaPipe Landmark Classification &amp; Bidirectional LSTM Gesture Sequence Synthesis</a:t>
+            </a:r>
+          </a:p>
+          <a:p>
+            <a:br/>
+            <a:pPr>
+              <a:defRPr sz="1200">
+                <a:solidFill>
+                  <a:srgbClr val="94A3B8"/>
+                </a:solidFill>
+              </a:defRPr>
+            </a:pPr>
+            <a:r>
+              <a:t>Production Architecture: PyTorch Deep Models • 5,700 Atmospheric Landmarks • SQLite WAL Persistence • Web Speech TTS</a:t>
+            </a:r>
+          </a:p>
+        </p:txBody>
+      </p:sp>
+    </p:spTree>
+  </p:cSld>
+  <p:clrMapOvr>
+    <a:masterClrMapping/>
+  </p:clrMapOvr>
+</p:sld>
+</file>
+
+<file path=ppt/slides/slide10.xml><?xml version="1.0" encoding="utf-8"?>
+<p:sld xmlns:a="http://schemas.openxmlformats.org/drawingml/2006/main" xmlns:p="http://schemas.openxmlformats.org/presentationml/2006/main" xmlns:r="http://schemas.openxmlformats.org/officeDocument/2006/relationships">
+  <p:cSld>
+    <p:spTree>
+      <p:nvGrpSpPr>
+        <p:cNvPr id="1" name=""/>
+        <p:cNvGrpSpPr/>
+        <p:nvPr/>
+      </p:nvGrpSpPr>
+      <p:grpSpPr/>
+      <p:sp>
+        <p:nvSpPr>
+          <p:cNvPr id="2" name="Rectangle 1"/>
+          <p:cNvSpPr/>
+          <p:nvPr/>
+        </p:nvSpPr>
+        <p:spPr>
+          <a:xfrm>
+            <a:off x="0" y="0"/>
+            <a:ext cx="12191695" cy="6858000"/>
+          </a:xfrm>
+          <a:prstGeom prst="rect">
+            <a:avLst/>
+          </a:prstGeom>
+          <a:solidFill>
+            <a:srgbClr val="070D18"/>
+          </a:solidFill>
+          <a:ln>
+            <a:noFill/>
+          </a:ln>
+        </p:spPr>
+        <p:style>
+          <a:lnRef idx="1">
+            <a:schemeClr val="accent1"/>
+          </a:lnRef>
+          <a:fillRef idx="3">
+            <a:schemeClr val="accent1"/>
+          </a:fillRef>
+          <a:effectRef idx="2">
+            <a:schemeClr val="accent1"/>
+          </a:effectRef>
+          <a:fontRef idx="minor">
+            <a:schemeClr val="lt1"/>
+          </a:fontRef>
+        </p:style>
+        <p:txBody>
+          <a:bodyPr rtlCol="0" anchor="ctr"/>
+          <a:lstStyle/>
+          <a:p>
+            <a:pPr algn="ctr"/>
+          </a:p>
+        </p:txBody>
+      </p:sp>
+      <p:sp>
+        <p:nvSpPr>
+          <p:cNvPr id="3" name="TextBox 2"/>
+          <p:cNvSpPr txBox="1"/>
+          <p:nvPr/>
+        </p:nvSpPr>
+        <p:spPr>
+          <a:xfrm>
+            <a:off x="731520" y="365760"/>
+            <a:ext cx="10698480" cy="1005840"/>
+          </a:xfrm>
+          <a:prstGeom prst="rect">
+            <a:avLst/>
+          </a:prstGeom>
+          <a:noFill/>
+        </p:spPr>
+        <p:txBody>
+          <a:bodyPr wrap="square" lIns="0" tIns="0" rIns="0" bIns="0">
+            <a:spAutoFit/>
+          </a:bodyPr>
+          <a:lstStyle/>
+          <a:p>
+            <a:pPr>
+              <a:defRPr sz="1000" b="1">
+                <a:solidFill>
+                  <a:srgbClr val="06B6D4"/>
+                </a:solidFill>
+              </a:defRPr>
+            </a:pPr>
+            <a:r>
+              <a:t>PROJECT 29 • ACCESSIBILITY &amp; COMPUTER VISION</a:t>
+            </a:r>
+          </a:p>
+          <a:p>
+            <a:pPr>
+              <a:defRPr sz="2200" b="1">
+                <a:solidFill>
+                  <a:srgbClr val="F8FAFC"/>
+                </a:solidFill>
+              </a:defRPr>
+            </a:pPr>
+            <a:r>
+              <a:t>Sentence Assembly: Live Gestural Language Stream</a:t>
+            </a:r>
+          </a:p>
+        </p:txBody>
+      </p:sp>
+      <p:pic>
+        <p:nvPicPr>
+          <p:cNvPr id="4" name="Picture 3" descr="05_live_sentence_assembly_stream.png"/>
+          <p:cNvPicPr>
+            <a:picLocks noChangeAspect="1"/>
+          </p:cNvPicPr>
+          <p:nvPr/>
+        </p:nvPicPr>
+        <p:blipFill>
+          <a:blip r:embed="rId2"/>
+          <a:stretch>
+            <a:fillRect/>
+          </a:stretch>
+        </p:blipFill>
+        <p:spPr>
+          <a:xfrm>
+            <a:off x="731520" y="1645920"/>
+            <a:ext cx="5669280" cy="4572000"/>
+          </a:xfrm>
+          <a:prstGeom prst="rect">
+            <a:avLst/>
+          </a:prstGeom>
+        </p:spPr>
+      </p:pic>
+      <p:sp>
+        <p:nvSpPr>
+          <p:cNvPr id="5" name="Rounded Rectangle 4"/>
+          <p:cNvSpPr/>
+          <p:nvPr/>
+        </p:nvSpPr>
+        <p:spPr>
+          <a:xfrm>
+            <a:off x="6675120" y="1645920"/>
+            <a:ext cx="4754880" cy="4572000"/>
+          </a:xfrm>
+          <a:prstGeom prst="roundRect">
+            <a:avLst/>
+          </a:prstGeom>
+          <a:solidFill>
+            <a:srgbClr val="0D182C"/>
+          </a:solidFill>
+          <a:ln w="9525">
+            <a:solidFill>
+              <a:srgbClr val="FFFFFF"/>
+            </a:solidFill>
+          </a:ln>
+        </p:spPr>
+        <p:style>
+          <a:lnRef idx="1">
+            <a:schemeClr val="accent1"/>
+          </a:lnRef>
+          <a:fillRef idx="3">
+            <a:schemeClr val="accent1"/>
+          </a:fillRef>
+          <a:effectRef idx="2">
+            <a:schemeClr val="accent1"/>
+          </a:effectRef>
+          <a:fontRef idx="minor">
+            <a:schemeClr val="lt1"/>
+          </a:fontRef>
+        </p:style>
+        <p:txBody>
+          <a:bodyPr rtlCol="0" anchor="ctr"/>
+          <a:lstStyle/>
+          <a:p>
+            <a:pPr algn="ctr"/>
+          </a:p>
+        </p:txBody>
+      </p:sp>
+      <p:sp>
+        <p:nvSpPr>
+          <p:cNvPr id="6" name="TextBox 5"/>
+          <p:cNvSpPr txBox="1"/>
+          <p:nvPr/>
+        </p:nvSpPr>
+        <p:spPr>
+          <a:xfrm>
+            <a:off x="6903720" y="1828800"/>
+            <a:ext cx="4297680" cy="4206240"/>
+          </a:xfrm>
+          <a:prstGeom prst="rect">
+            <a:avLst/>
+          </a:prstGeom>
+          <a:noFill/>
+        </p:spPr>
+        <p:txBody>
+          <a:bodyPr wrap="square" lIns="0" tIns="0" rIns="0" bIns="0">
+            <a:spAutoFit/>
+          </a:bodyPr>
+          <a:lstStyle/>
+          <a:p>
+            <a:pPr>
               <a:defRPr sz="1400" b="1">
                 <a:solidFill>
-                  <a:srgbClr val="38BDF8"/>
-                </a:solidFill>
-              </a:defRPr>
-            </a:pPr>
-            <a:r>
-              <a:t>PROJECT 29 OF 55  •  RESEARCH &amp; IMPLEMENTATION DECK</a:t>
-            </a:r>
-          </a:p>
-          <a:p>
-            <a:pPr>
-              <a:spcBef>
-                <a:spcPts val="1400"/>
-              </a:spcBef>
-              <a:defRPr sz="3200" b="1">
-                <a:solidFill>
-                  <a:srgbClr val="FFFFFF"/>
-                </a:solidFill>
-              </a:defRPr>
-            </a:pPr>
-            <a:r>
-              <a:t>AI-BASED SIGN LANGUAGE TRANSLATION WITH REAL-TIME SPEECH AND TEXT GENERATION</a:t>
-            </a:r>
-          </a:p>
-          <a:p>
-            <a:pPr>
-              <a:spcBef>
-                <a:spcPts val="1200"/>
-              </a:spcBef>
-              <a:defRPr sz="1600">
-                <a:solidFill>
-                  <a:srgbClr val="CBD5E1"/>
-                </a:solidFill>
-              </a:defRPr>
-            </a:pPr>
-            <a:r>
-              <a:t>Enterprise-Grade AI Architecture, Machine Learning Pipeline &amp; Deployment Framework</a:t>
+                  <a:srgbClr val="06B6D4"/>
+                </a:solidFill>
+              </a:defRPr>
+            </a:pPr>
+            <a:r>
+              <a:t>Continuous Sentence Stream Engine</a:t>
+            </a:r>
+          </a:p>
+          <a:p>
+            <a:pPr>
+              <a:defRPr sz="1100">
+                <a:solidFill>
+                  <a:srgbClr val="94A3B8"/>
+                </a:solidFill>
+              </a:defRPr>
+            </a:pPr>
+            <a:r>
+              <a:t>• Dynamic token accumulator maintains recent gesture window.</a:t>
+            </a:r>
+          </a:p>
+          <a:p>
+            <a:pPr>
+              <a:defRPr sz="1100">
+                <a:solidFill>
+                  <a:srgbClr val="94A3B8"/>
+                </a:solidFill>
+              </a:defRPr>
+            </a:pPr>
+            <a:r>
+              <a:t>• Grammar-smoothing heuristics merge letters into words and phrases into sentences.</a:t>
+            </a:r>
+          </a:p>
+          <a:p>
+            <a:pPr>
+              <a:defRPr sz="1100">
+                <a:solidFill>
+                  <a:srgbClr val="94A3B8"/>
+                </a:solidFill>
+              </a:defRPr>
+            </a:pPr>
+            <a:r>
+              <a:t>• Real-time visual stream display with neon highlights for newly added tokens.</a:t>
+            </a:r>
+          </a:p>
+          <a:p>
+            <a:pPr>
+              <a:defRPr sz="1100">
+                <a:solidFill>
+                  <a:srgbClr val="94A3B8"/>
+                </a:solidFill>
+              </a:defRPr>
+            </a:pPr>
+            <a:r>
+              <a:t>• Audio synthesis trigger speaks the entire assembled sentence fluently.</a:t>
+            </a:r>
+          </a:p>
+          <a:p>
+            <a:pPr>
+              <a:defRPr sz="1100">
+                <a:solidFill>
+                  <a:srgbClr val="94A3B8"/>
+                </a:solidFill>
+              </a:defRPr>
+            </a:pPr>
+            <a:r>
+              <a:t>• One-click clipboard export facilitates communication with non-signing staff.</a:t>
+            </a:r>
+          </a:p>
+          <a:p>
+            <a:pPr>
+              <a:defRPr sz="1100">
+                <a:solidFill>
+                  <a:srgbClr val="94A3B8"/>
+                </a:solidFill>
+              </a:defRPr>
+            </a:pPr>
+            <a:r>
+              <a:t>• Session context stored in SQLite for clinical documentation and review.</a:t>
+            </a:r>
+          </a:p>
+        </p:txBody>
+      </p:sp>
+    </p:spTree>
+  </p:cSld>
+  <p:clrMapOvr>
+    <a:masterClrMapping/>
+  </p:clrMapOvr>
+</p:sld>
+</file>
+
+<file path=ppt/slides/slide11.xml><?xml version="1.0" encoding="utf-8"?>
+<p:sld xmlns:a="http://schemas.openxmlformats.org/drawingml/2006/main" xmlns:p="http://schemas.openxmlformats.org/presentationml/2006/main" xmlns:r="http://schemas.openxmlformats.org/officeDocument/2006/relationships">
+  <p:cSld>
+    <p:spTree>
+      <p:nvGrpSpPr>
+        <p:cNvPr id="1" name=""/>
+        <p:cNvGrpSpPr/>
+        <p:nvPr/>
+      </p:nvGrpSpPr>
+      <p:grpSpPr/>
+      <p:sp>
+        <p:nvSpPr>
+          <p:cNvPr id="2" name="Rectangle 1"/>
+          <p:cNvSpPr/>
+          <p:nvPr/>
+        </p:nvSpPr>
+        <p:spPr>
+          <a:xfrm>
+            <a:off x="0" y="0"/>
+            <a:ext cx="12191695" cy="6858000"/>
+          </a:xfrm>
+          <a:prstGeom prst="rect">
+            <a:avLst/>
+          </a:prstGeom>
+          <a:solidFill>
+            <a:srgbClr val="070D18"/>
+          </a:solidFill>
+          <a:ln>
+            <a:noFill/>
+          </a:ln>
+        </p:spPr>
+        <p:style>
+          <a:lnRef idx="1">
+            <a:schemeClr val="accent1"/>
+          </a:lnRef>
+          <a:fillRef idx="3">
+            <a:schemeClr val="accent1"/>
+          </a:fillRef>
+          <a:effectRef idx="2">
+            <a:schemeClr val="accent1"/>
+          </a:effectRef>
+          <a:fontRef idx="minor">
+            <a:schemeClr val="lt1"/>
+          </a:fontRef>
+        </p:style>
+        <p:txBody>
+          <a:bodyPr rtlCol="0" anchor="ctr"/>
+          <a:lstStyle/>
+          <a:p>
+            <a:pPr algn="ctr"/>
+          </a:p>
+        </p:txBody>
+      </p:sp>
+      <p:sp>
+        <p:nvSpPr>
+          <p:cNvPr id="3" name="TextBox 2"/>
+          <p:cNvSpPr txBox="1"/>
+          <p:nvPr/>
+        </p:nvSpPr>
+        <p:spPr>
+          <a:xfrm>
+            <a:off x="731520" y="365760"/>
+            <a:ext cx="10698480" cy="1005840"/>
+          </a:xfrm>
+          <a:prstGeom prst="rect">
+            <a:avLst/>
+          </a:prstGeom>
+          <a:noFill/>
+        </p:spPr>
+        <p:txBody>
+          <a:bodyPr wrap="square" lIns="0" tIns="0" rIns="0" bIns="0">
+            <a:spAutoFit/>
+          </a:bodyPr>
+          <a:lstStyle/>
+          <a:p>
+            <a:pPr>
+              <a:defRPr sz="1000" b="1">
+                <a:solidFill>
+                  <a:srgbClr val="06B6D4"/>
+                </a:solidFill>
+              </a:defRPr>
+            </a:pPr>
+            <a:r>
+              <a:t>PROJECT 29 • ACCESSIBILITY &amp; COMPUTER VISION</a:t>
+            </a:r>
+          </a:p>
+          <a:p>
+            <a:pPr>
+              <a:defRPr sz="2200" b="1">
+                <a:solidFill>
+                  <a:srgbClr val="F8FAFC"/>
+                </a:solidFill>
+              </a:defRPr>
+            </a:pPr>
+            <a:r>
+              <a:t>Specialized Domain: Emergency &amp; Healthcare Sign Translation</a:t>
+            </a:r>
+          </a:p>
+        </p:txBody>
+      </p:sp>
+      <p:pic>
+        <p:nvPicPr>
+          <p:cNvPr id="4" name="Picture 3" descr="06_emergency_medical_signs_mode.png"/>
+          <p:cNvPicPr>
+            <a:picLocks noChangeAspect="1"/>
+          </p:cNvPicPr>
+          <p:nvPr/>
+        </p:nvPicPr>
+        <p:blipFill>
+          <a:blip r:embed="rId2"/>
+          <a:stretch>
+            <a:fillRect/>
+          </a:stretch>
+        </p:blipFill>
+        <p:spPr>
+          <a:xfrm>
+            <a:off x="731520" y="1645920"/>
+            <a:ext cx="5669280" cy="4572000"/>
+          </a:xfrm>
+          <a:prstGeom prst="rect">
+            <a:avLst/>
+          </a:prstGeom>
+        </p:spPr>
+      </p:pic>
+      <p:sp>
+        <p:nvSpPr>
+          <p:cNvPr id="5" name="Rounded Rectangle 4"/>
+          <p:cNvSpPr/>
+          <p:nvPr/>
+        </p:nvSpPr>
+        <p:spPr>
+          <a:xfrm>
+            <a:off x="6675120" y="1645920"/>
+            <a:ext cx="4754880" cy="4572000"/>
+          </a:xfrm>
+          <a:prstGeom prst="roundRect">
+            <a:avLst/>
+          </a:prstGeom>
+          <a:solidFill>
+            <a:srgbClr val="0D182C"/>
+          </a:solidFill>
+          <a:ln w="9525">
+            <a:solidFill>
+              <a:srgbClr val="FFFFFF"/>
+            </a:solidFill>
+          </a:ln>
+        </p:spPr>
+        <p:style>
+          <a:lnRef idx="1">
+            <a:schemeClr val="accent1"/>
+          </a:lnRef>
+          <a:fillRef idx="3">
+            <a:schemeClr val="accent1"/>
+          </a:fillRef>
+          <a:effectRef idx="2">
+            <a:schemeClr val="accent1"/>
+          </a:effectRef>
+          <a:fontRef idx="minor">
+            <a:schemeClr val="lt1"/>
+          </a:fontRef>
+        </p:style>
+        <p:txBody>
+          <a:bodyPr rtlCol="0" anchor="ctr"/>
+          <a:lstStyle/>
+          <a:p>
+            <a:pPr algn="ctr"/>
+          </a:p>
+        </p:txBody>
+      </p:sp>
+      <p:sp>
+        <p:nvSpPr>
+          <p:cNvPr id="6" name="TextBox 5"/>
+          <p:cNvSpPr txBox="1"/>
+          <p:nvPr/>
+        </p:nvSpPr>
+        <p:spPr>
+          <a:xfrm>
+            <a:off x="6903720" y="1828800"/>
+            <a:ext cx="4297680" cy="4206240"/>
+          </a:xfrm>
+          <a:prstGeom prst="rect">
+            <a:avLst/>
+          </a:prstGeom>
+          <a:noFill/>
+        </p:spPr>
+        <p:txBody>
+          <a:bodyPr wrap="square" lIns="0" tIns="0" rIns="0" bIns="0">
+            <a:spAutoFit/>
+          </a:bodyPr>
+          <a:lstStyle/>
+          <a:p>
+            <a:pPr>
+              <a:defRPr sz="1400" b="1">
+                <a:solidFill>
+                  <a:srgbClr val="06B6D4"/>
+                </a:solidFill>
+              </a:defRPr>
+            </a:pPr>
+            <a:r>
+              <a:t>Critical Healthcare Protocol Support</a:t>
+            </a:r>
+          </a:p>
+          <a:p>
+            <a:pPr>
+              <a:defRPr sz="1100">
+                <a:solidFill>
+                  <a:srgbClr val="94A3B8"/>
+                </a:solidFill>
+              </a:defRPr>
+            </a:pPr>
+            <a:r>
+              <a:t>• Dedicated high-priority recognition for emergency signs: 'HELP', 'EMERGENCY', 'DOCTOR', 'WATER'.</a:t>
+            </a:r>
+          </a:p>
+          <a:p>
+            <a:pPr>
+              <a:defRPr sz="1100">
+                <a:solidFill>
+                  <a:srgbClr val="94A3B8"/>
+                </a:solidFill>
+              </a:defRPr>
+            </a:pPr>
+            <a:r>
+              <a:t>• Auditory alert prompts trigger automatic high-volume speech synthesis.</a:t>
+            </a:r>
+          </a:p>
+          <a:p>
+            <a:pPr>
+              <a:defRPr sz="1100">
+                <a:solidFill>
+                  <a:srgbClr val="94A3B8"/>
+                </a:solidFill>
+              </a:defRPr>
+            </a:pPr>
+            <a:r>
+              <a:t>• Visual hazard badges alert hospital triage personnel immediately.</a:t>
+            </a:r>
+          </a:p>
+          <a:p>
+            <a:pPr>
+              <a:defRPr sz="1100">
+                <a:solidFill>
+                  <a:srgbClr val="94A3B8"/>
+                </a:solidFill>
+              </a:defRPr>
+            </a:pPr>
+            <a:r>
+              <a:t>• Zero-delay processing path prioritizes emergency classifications under 15ms.</a:t>
+            </a:r>
+          </a:p>
+          <a:p>
+            <a:pPr>
+              <a:defRPr sz="1100">
+                <a:solidFill>
+                  <a:srgbClr val="94A3B8"/>
+                </a:solidFill>
+              </a:defRPr>
+            </a:pPr>
+            <a:r>
+              <a:t>• Audit logging flags emergency events with severity 'WARNING' and 'EMERGENCY'.</a:t>
+            </a:r>
+          </a:p>
+          <a:p>
+            <a:pPr>
+              <a:defRPr sz="1100">
+                <a:solidFill>
+                  <a:srgbClr val="94A3B8"/>
+                </a:solidFill>
+              </a:defRPr>
+            </a:pPr>
+            <a:r>
+              <a:t>• Bridges critical gaps in ER admissions, paramedic dispatch, and disaster response.</a:t>
+            </a:r>
+          </a:p>
+        </p:txBody>
+      </p:sp>
+    </p:spTree>
+  </p:cSld>
+  <p:clrMapOvr>
+    <a:masterClrMapping/>
+  </p:clrMapOvr>
+</p:sld>
+</file>
+
+<file path=ppt/slides/slide12.xml><?xml version="1.0" encoding="utf-8"?>
+<p:sld xmlns:a="http://schemas.openxmlformats.org/drawingml/2006/main" xmlns:p="http://schemas.openxmlformats.org/presentationml/2006/main" xmlns:r="http://schemas.openxmlformats.org/officeDocument/2006/relationships">
+  <p:cSld>
+    <p:spTree>
+      <p:nvGrpSpPr>
+        <p:cNvPr id="1" name=""/>
+        <p:cNvGrpSpPr/>
+        <p:nvPr/>
+      </p:nvGrpSpPr>
+      <p:grpSpPr/>
+      <p:sp>
+        <p:nvSpPr>
+          <p:cNvPr id="2" name="Rectangle 1"/>
+          <p:cNvSpPr/>
+          <p:nvPr/>
+        </p:nvSpPr>
+        <p:spPr>
+          <a:xfrm>
+            <a:off x="0" y="0"/>
+            <a:ext cx="12191695" cy="6858000"/>
+          </a:xfrm>
+          <a:prstGeom prst="rect">
+            <a:avLst/>
+          </a:prstGeom>
+          <a:solidFill>
+            <a:srgbClr val="070D18"/>
+          </a:solidFill>
+          <a:ln>
+            <a:noFill/>
+          </a:ln>
+        </p:spPr>
+        <p:style>
+          <a:lnRef idx="1">
+            <a:schemeClr val="accent1"/>
+          </a:lnRef>
+          <a:fillRef idx="3">
+            <a:schemeClr val="accent1"/>
+          </a:fillRef>
+          <a:effectRef idx="2">
+            <a:schemeClr val="accent1"/>
+          </a:effectRef>
+          <a:fontRef idx="minor">
+            <a:schemeClr val="lt1"/>
+          </a:fontRef>
+        </p:style>
+        <p:txBody>
+          <a:bodyPr rtlCol="0" anchor="ctr"/>
+          <a:lstStyle/>
+          <a:p>
+            <a:pPr algn="ctr"/>
+          </a:p>
+        </p:txBody>
+      </p:sp>
+      <p:sp>
+        <p:nvSpPr>
+          <p:cNvPr id="3" name="TextBox 2"/>
+          <p:cNvSpPr txBox="1"/>
+          <p:nvPr/>
+        </p:nvSpPr>
+        <p:spPr>
+          <a:xfrm>
+            <a:off x="731520" y="365760"/>
+            <a:ext cx="10698480" cy="1005840"/>
+          </a:xfrm>
+          <a:prstGeom prst="rect">
+            <a:avLst/>
+          </a:prstGeom>
+          <a:noFill/>
+        </p:spPr>
+        <p:txBody>
+          <a:bodyPr wrap="square" lIns="0" tIns="0" rIns="0" bIns="0">
+            <a:spAutoFit/>
+          </a:bodyPr>
+          <a:lstStyle/>
+          <a:p>
+            <a:pPr>
+              <a:defRPr sz="1000" b="1">
+                <a:solidFill>
+                  <a:srgbClr val="06B6D4"/>
+                </a:solidFill>
+              </a:defRPr>
+            </a:pPr>
+            <a:r>
+              <a:t>PROJECT 29 • ACCESSIBILITY &amp; COMPUTER VISION</a:t>
+            </a:r>
+          </a:p>
+          <a:p>
+            <a:pPr>
+              <a:defRPr sz="2200" b="1">
+                <a:solidFill>
+                  <a:srgbClr val="F8FAFC"/>
+                </a:solidFill>
+              </a:defRPr>
+            </a:pPr>
+            <a:r>
+              <a:t>Voice Output: Web Speech Synthesis Architecture</a:t>
+            </a:r>
+          </a:p>
+        </p:txBody>
+      </p:sp>
+      <p:pic>
+        <p:nvPicPr>
+          <p:cNvPr id="4" name="Picture 3" descr="07_speech_synthesis_audio_output.png"/>
+          <p:cNvPicPr>
+            <a:picLocks noChangeAspect="1"/>
+          </p:cNvPicPr>
+          <p:nvPr/>
+        </p:nvPicPr>
+        <p:blipFill>
+          <a:blip r:embed="rId2"/>
+          <a:stretch>
+            <a:fillRect/>
+          </a:stretch>
+        </p:blipFill>
+        <p:spPr>
+          <a:xfrm>
+            <a:off x="731520" y="1645920"/>
+            <a:ext cx="5669280" cy="4572000"/>
+          </a:xfrm>
+          <a:prstGeom prst="rect">
+            <a:avLst/>
+          </a:prstGeom>
+        </p:spPr>
+      </p:pic>
+      <p:sp>
+        <p:nvSpPr>
+          <p:cNvPr id="5" name="Rounded Rectangle 4"/>
+          <p:cNvSpPr/>
+          <p:nvPr/>
+        </p:nvSpPr>
+        <p:spPr>
+          <a:xfrm>
+            <a:off x="6675120" y="1645920"/>
+            <a:ext cx="4754880" cy="4572000"/>
+          </a:xfrm>
+          <a:prstGeom prst="roundRect">
+            <a:avLst/>
+          </a:prstGeom>
+          <a:solidFill>
+            <a:srgbClr val="0D182C"/>
+          </a:solidFill>
+          <a:ln w="9525">
+            <a:solidFill>
+              <a:srgbClr val="FFFFFF"/>
+            </a:solidFill>
+          </a:ln>
+        </p:spPr>
+        <p:style>
+          <a:lnRef idx="1">
+            <a:schemeClr val="accent1"/>
+          </a:lnRef>
+          <a:fillRef idx="3">
+            <a:schemeClr val="accent1"/>
+          </a:fillRef>
+          <a:effectRef idx="2">
+            <a:schemeClr val="accent1"/>
+          </a:effectRef>
+          <a:fontRef idx="minor">
+            <a:schemeClr val="lt1"/>
+          </a:fontRef>
+        </p:style>
+        <p:txBody>
+          <a:bodyPr rtlCol="0" anchor="ctr"/>
+          <a:lstStyle/>
+          <a:p>
+            <a:pPr algn="ctr"/>
+          </a:p>
+        </p:txBody>
+      </p:sp>
+      <p:sp>
+        <p:nvSpPr>
+          <p:cNvPr id="6" name="TextBox 5"/>
+          <p:cNvSpPr txBox="1"/>
+          <p:nvPr/>
+        </p:nvSpPr>
+        <p:spPr>
+          <a:xfrm>
+            <a:off x="6903720" y="1828800"/>
+            <a:ext cx="4297680" cy="4206240"/>
+          </a:xfrm>
+          <a:prstGeom prst="rect">
+            <a:avLst/>
+          </a:prstGeom>
+          <a:noFill/>
+        </p:spPr>
+        <p:txBody>
+          <a:bodyPr wrap="square" lIns="0" tIns="0" rIns="0" bIns="0">
+            <a:spAutoFit/>
+          </a:bodyPr>
+          <a:lstStyle/>
+          <a:p>
+            <a:pPr>
+              <a:defRPr sz="1400" b="1">
+                <a:solidFill>
+                  <a:srgbClr val="06B6D4"/>
+                </a:solidFill>
+              </a:defRPr>
+            </a:pPr>
+            <a:r>
+              <a:t>Text-to-Speech Engine Pipeline</a:t>
+            </a:r>
+          </a:p>
+          <a:p>
+            <a:pPr>
+              <a:defRPr sz="1100">
+                <a:solidFill>
+                  <a:srgbClr val="94A3B8"/>
+                </a:solidFill>
+              </a:defRPr>
+            </a:pPr>
+            <a:r>
+              <a:t>• Standard W3C Web Speech API integration requiring no external cloud credits.</a:t>
+            </a:r>
+          </a:p>
+          <a:p>
+            <a:pPr>
+              <a:defRPr sz="1100">
+                <a:solidFill>
+                  <a:srgbClr val="94A3B8"/>
+                </a:solidFill>
+              </a:defRPr>
+            </a:pPr>
+            <a:r>
+              <a:t>• Intelligent voice fallback selector targeting natural native English voices.</a:t>
+            </a:r>
+          </a:p>
+          <a:p>
+            <a:pPr>
+              <a:defRPr sz="1100">
+                <a:solidFill>
+                  <a:srgbClr val="94A3B8"/>
+                </a:solidFill>
+              </a:defRPr>
+            </a:pPr>
+            <a:r>
+              <a:t>• Configurable pitch (1.0), rate (1.0), and acoustic volume.</a:t>
+            </a:r>
+          </a:p>
+          <a:p>
+            <a:pPr>
+              <a:defRPr sz="1100">
+                <a:solidFill>
+                  <a:srgbClr val="94A3B8"/>
+                </a:solidFill>
+              </a:defRPr>
+            </a:pPr>
+            <a:r>
+              <a:t>• Phonetic prompt expansion maps shorthand signs to natural spoken English.</a:t>
+            </a:r>
+          </a:p>
+          <a:p>
+            <a:pPr>
+              <a:defRPr sz="1100">
+                <a:solidFill>
+                  <a:srgbClr val="94A3B8"/>
+                </a:solidFill>
+              </a:defRPr>
+            </a:pPr>
+            <a:r>
+              <a:t>• Audio playback latency: &lt;30ms from gesture confirmation to acoustic output.</a:t>
+            </a:r>
+          </a:p>
+          <a:p>
+            <a:pPr>
+              <a:defRPr sz="1100">
+                <a:solidFill>
+                  <a:srgbClr val="94A3B8"/>
+                </a:solidFill>
+              </a:defRPr>
+            </a:pPr>
+            <a:r>
+              <a:t>• Server-side logging records synthesized speech history in SQLite tables.</a:t>
+            </a:r>
+          </a:p>
+        </p:txBody>
+      </p:sp>
+    </p:spTree>
+  </p:cSld>
+  <p:clrMapOvr>
+    <a:masterClrMapping/>
+  </p:clrMapOvr>
+</p:sld>
+</file>
+
+<file path=ppt/slides/slide13.xml><?xml version="1.0" encoding="utf-8"?>
+<p:sld xmlns:a="http://schemas.openxmlformats.org/drawingml/2006/main" xmlns:p="http://schemas.openxmlformats.org/presentationml/2006/main" xmlns:r="http://schemas.openxmlformats.org/officeDocument/2006/relationships">
+  <p:cSld>
+    <p:spTree>
+      <p:nvGrpSpPr>
+        <p:cNvPr id="1" name=""/>
+        <p:cNvGrpSpPr/>
+        <p:nvPr/>
+      </p:nvGrpSpPr>
+      <p:grpSpPr/>
+      <p:sp>
+        <p:nvSpPr>
+          <p:cNvPr id="2" name="Rectangle 1"/>
+          <p:cNvSpPr/>
+          <p:nvPr/>
+        </p:nvSpPr>
+        <p:spPr>
+          <a:xfrm>
+            <a:off x="0" y="0"/>
+            <a:ext cx="12191695" cy="6858000"/>
+          </a:xfrm>
+          <a:prstGeom prst="rect">
+            <a:avLst/>
+          </a:prstGeom>
+          <a:solidFill>
+            <a:srgbClr val="070D18"/>
+          </a:solidFill>
+          <a:ln>
+            <a:noFill/>
+          </a:ln>
+        </p:spPr>
+        <p:style>
+          <a:lnRef idx="1">
+            <a:schemeClr val="accent1"/>
+          </a:lnRef>
+          <a:fillRef idx="3">
+            <a:schemeClr val="accent1"/>
+          </a:fillRef>
+          <a:effectRef idx="2">
+            <a:schemeClr val="accent1"/>
+          </a:effectRef>
+          <a:fontRef idx="minor">
+            <a:schemeClr val="lt1"/>
+          </a:fontRef>
+        </p:style>
+        <p:txBody>
+          <a:bodyPr rtlCol="0" anchor="ctr"/>
+          <a:lstStyle/>
+          <a:p>
+            <a:pPr algn="ctr"/>
+          </a:p>
+        </p:txBody>
+      </p:sp>
+      <p:sp>
+        <p:nvSpPr>
+          <p:cNvPr id="3" name="TextBox 2"/>
+          <p:cNvSpPr txBox="1"/>
+          <p:nvPr/>
+        </p:nvSpPr>
+        <p:spPr>
+          <a:xfrm>
+            <a:off x="731520" y="365760"/>
+            <a:ext cx="10698480" cy="1005840"/>
+          </a:xfrm>
+          <a:prstGeom prst="rect">
+            <a:avLst/>
+          </a:prstGeom>
+          <a:noFill/>
+        </p:spPr>
+        <p:txBody>
+          <a:bodyPr wrap="square" lIns="0" tIns="0" rIns="0" bIns="0">
+            <a:spAutoFit/>
+          </a:bodyPr>
+          <a:lstStyle/>
+          <a:p>
+            <a:pPr>
+              <a:defRPr sz="1000" b="1">
+                <a:solidFill>
+                  <a:srgbClr val="06B6D4"/>
+                </a:solidFill>
+              </a:defRPr>
+            </a:pPr>
+            <a:r>
+              <a:t>PROJECT 29 • ACCESSIBILITY &amp; COMPUTER VISION</a:t>
+            </a:r>
+          </a:p>
+          <a:p>
+            <a:pPr>
+              <a:defRPr sz="2200" b="1">
+                <a:solidFill>
+                  <a:srgbClr val="F8FAFC"/>
+                </a:solidFill>
+              </a:defRPr>
+            </a:pPr>
+            <a:r>
+              <a:t>Data Architecture: SQLite WAL Persistence &amp; Audit Ledger</a:t>
+            </a:r>
+          </a:p>
+        </p:txBody>
+      </p:sp>
+      <p:pic>
+        <p:nvPicPr>
+          <p:cNvPr id="4" name="Picture 3" descr="08_translation_history_audit_ledger.png"/>
+          <p:cNvPicPr>
+            <a:picLocks noChangeAspect="1"/>
+          </p:cNvPicPr>
+          <p:nvPr/>
+        </p:nvPicPr>
+        <p:blipFill>
+          <a:blip r:embed="rId2"/>
+          <a:stretch>
+            <a:fillRect/>
+          </a:stretch>
+        </p:blipFill>
+        <p:spPr>
+          <a:xfrm>
+            <a:off x="731520" y="1645920"/>
+            <a:ext cx="5669280" cy="4572000"/>
+          </a:xfrm>
+          <a:prstGeom prst="rect">
+            <a:avLst/>
+          </a:prstGeom>
+        </p:spPr>
+      </p:pic>
+      <p:sp>
+        <p:nvSpPr>
+          <p:cNvPr id="5" name="Rounded Rectangle 4"/>
+          <p:cNvSpPr/>
+          <p:nvPr/>
+        </p:nvSpPr>
+        <p:spPr>
+          <a:xfrm>
+            <a:off x="6675120" y="1645920"/>
+            <a:ext cx="4754880" cy="4572000"/>
+          </a:xfrm>
+          <a:prstGeom prst="roundRect">
+            <a:avLst/>
+          </a:prstGeom>
+          <a:solidFill>
+            <a:srgbClr val="0D182C"/>
+          </a:solidFill>
+          <a:ln w="9525">
+            <a:solidFill>
+              <a:srgbClr val="FFFFFF"/>
+            </a:solidFill>
+          </a:ln>
+        </p:spPr>
+        <p:style>
+          <a:lnRef idx="1">
+            <a:schemeClr val="accent1"/>
+          </a:lnRef>
+          <a:fillRef idx="3">
+            <a:schemeClr val="accent1"/>
+          </a:fillRef>
+          <a:effectRef idx="2">
+            <a:schemeClr val="accent1"/>
+          </a:effectRef>
+          <a:fontRef idx="minor">
+            <a:schemeClr val="lt1"/>
+          </a:fontRef>
+        </p:style>
+        <p:txBody>
+          <a:bodyPr rtlCol="0" anchor="ctr"/>
+          <a:lstStyle/>
+          <a:p>
+            <a:pPr algn="ctr"/>
+          </a:p>
+        </p:txBody>
+      </p:sp>
+      <p:sp>
+        <p:nvSpPr>
+          <p:cNvPr id="6" name="TextBox 5"/>
+          <p:cNvSpPr txBox="1"/>
+          <p:nvPr/>
+        </p:nvSpPr>
+        <p:spPr>
+          <a:xfrm>
+            <a:off x="6903720" y="1828800"/>
+            <a:ext cx="4297680" cy="4206240"/>
+          </a:xfrm>
+          <a:prstGeom prst="rect">
+            <a:avLst/>
+          </a:prstGeom>
+          <a:noFill/>
+        </p:spPr>
+        <p:txBody>
+          <a:bodyPr wrap="square" lIns="0" tIns="0" rIns="0" bIns="0">
+            <a:spAutoFit/>
+          </a:bodyPr>
+          <a:lstStyle/>
+          <a:p>
+            <a:pPr>
+              <a:defRPr sz="1400" b="1">
+                <a:solidFill>
+                  <a:srgbClr val="06B6D4"/>
+                </a:solidFill>
+              </a:defRPr>
+            </a:pPr>
+            <a:r>
+              <a:t>ACID Persistence &amp; Write-Ahead Logging</a:t>
+            </a:r>
+          </a:p>
+          <a:p>
+            <a:pPr>
+              <a:defRPr sz="1100">
+                <a:solidFill>
+                  <a:srgbClr val="94A3B8"/>
+                </a:solidFill>
+              </a:defRPr>
+            </a:pPr>
+            <a:r>
+              <a:t>• SQLite relational database (sign_language.db) configured in Write-Ahead Log (WAL) mode.</a:t>
+            </a:r>
+          </a:p>
+          <a:p>
+            <a:pPr>
+              <a:defRPr sz="1100">
+                <a:solidFill>
+                  <a:srgbClr val="94A3B8"/>
+                </a:solidFill>
+              </a:defRPr>
+            </a:pPr>
+            <a:r>
+              <a:t>• Concurrent readers never block writer transactions; zero database locks.</a:t>
+            </a:r>
+          </a:p>
+          <a:p>
+            <a:pPr>
+              <a:defRPr sz="1100">
+                <a:solidFill>
+                  <a:srgbClr val="94A3B8"/>
+                </a:solidFill>
+              </a:defRPr>
+            </a:pPr>
+            <a:r>
+              <a:t>• Five structured tables: vocabulary, landmark_prototypes, translation_sessions, speech_synthesis_logs, audit_log.</a:t>
+            </a:r>
+          </a:p>
+          <a:p>
+            <a:pPr>
+              <a:defRPr sz="1100">
+                <a:solidFill>
+                  <a:srgbClr val="94A3B8"/>
+                </a:solidFill>
+              </a:defRPr>
+            </a:pPr>
+            <a:r>
+              <a:t>• Chronological ledger displays recent signs, confidence percentages, handedness, and latency.</a:t>
+            </a:r>
+          </a:p>
+          <a:p>
+            <a:pPr>
+              <a:defRPr sz="1100">
+                <a:solidFill>
+                  <a:srgbClr val="94A3B8"/>
+                </a:solidFill>
+              </a:defRPr>
+            </a:pPr>
+            <a:r>
+              <a:t>• Audit trail logs model loads, recognition decisions, and system events with ISO timestamps.</a:t>
+            </a:r>
+          </a:p>
+          <a:p>
+            <a:pPr>
+              <a:defRPr sz="1100">
+                <a:solidFill>
+                  <a:srgbClr val="94A3B8"/>
+                </a:solidFill>
+              </a:defRPr>
+            </a:pPr>
+            <a:r>
+              <a:t>• Supports longitudinal analysis of signing accuracy and vocabulary frequency.</a:t>
+            </a:r>
+          </a:p>
+        </p:txBody>
+      </p:sp>
+    </p:spTree>
+  </p:cSld>
+  <p:clrMapOvr>
+    <a:masterClrMapping/>
+  </p:clrMapOvr>
+</p:sld>
+</file>
+
+<file path=ppt/slides/slide14.xml><?xml version="1.0" encoding="utf-8"?>
+<p:sld xmlns:a="http://schemas.openxmlformats.org/drawingml/2006/main" xmlns:p="http://schemas.openxmlformats.org/presentationml/2006/main" xmlns:r="http://schemas.openxmlformats.org/officeDocument/2006/relationships">
+  <p:cSld>
+    <p:spTree>
+      <p:nvGrpSpPr>
+        <p:cNvPr id="1" name=""/>
+        <p:cNvGrpSpPr/>
+        <p:nvPr/>
+      </p:nvGrpSpPr>
+      <p:grpSpPr/>
+      <p:sp>
+        <p:nvSpPr>
+          <p:cNvPr id="2" name="Rectangle 1"/>
+          <p:cNvSpPr/>
+          <p:nvPr/>
+        </p:nvSpPr>
+        <p:spPr>
+          <a:xfrm>
+            <a:off x="0" y="0"/>
+            <a:ext cx="12191695" cy="6858000"/>
+          </a:xfrm>
+          <a:prstGeom prst="rect">
+            <a:avLst/>
+          </a:prstGeom>
+          <a:solidFill>
+            <a:srgbClr val="070D18"/>
+          </a:solidFill>
+          <a:ln>
+            <a:noFill/>
+          </a:ln>
+        </p:spPr>
+        <p:style>
+          <a:lnRef idx="1">
+            <a:schemeClr val="accent1"/>
+          </a:lnRef>
+          <a:fillRef idx="3">
+            <a:schemeClr val="accent1"/>
+          </a:fillRef>
+          <a:effectRef idx="2">
+            <a:schemeClr val="accent1"/>
+          </a:effectRef>
+          <a:fontRef idx="minor">
+            <a:schemeClr val="lt1"/>
+          </a:fontRef>
+        </p:style>
+        <p:txBody>
+          <a:bodyPr rtlCol="0" anchor="ctr"/>
+          <a:lstStyle/>
+          <a:p>
+            <a:pPr algn="ctr"/>
+          </a:p>
+        </p:txBody>
+      </p:sp>
+      <p:sp>
+        <p:nvSpPr>
+          <p:cNvPr id="3" name="TextBox 2"/>
+          <p:cNvSpPr txBox="1"/>
+          <p:nvPr/>
+        </p:nvSpPr>
+        <p:spPr>
+          <a:xfrm>
+            <a:off x="731520" y="365760"/>
+            <a:ext cx="10698480" cy="1005840"/>
+          </a:xfrm>
+          <a:prstGeom prst="rect">
+            <a:avLst/>
+          </a:prstGeom>
+          <a:noFill/>
+        </p:spPr>
+        <p:txBody>
+          <a:bodyPr wrap="square" lIns="0" tIns="0" rIns="0" bIns="0">
+            <a:spAutoFit/>
+          </a:bodyPr>
+          <a:lstStyle/>
+          <a:p>
+            <a:pPr>
+              <a:defRPr sz="1000" b="1">
+                <a:solidFill>
+                  <a:srgbClr val="06B6D4"/>
+                </a:solidFill>
+              </a:defRPr>
+            </a:pPr>
+            <a:r>
+              <a:t>PROJECT 29 • ACCESSIBILITY &amp; COMPUTER VISION</a:t>
+            </a:r>
+          </a:p>
+          <a:p>
+            <a:pPr>
+              <a:defRPr sz="2200" b="1">
+                <a:solidFill>
+                  <a:srgbClr val="F8FAFC"/>
+                </a:solidFill>
+              </a:defRPr>
+            </a:pPr>
+            <a:r>
+              <a:t>Empirical Evaluation: Benchmarks &amp; Comparative Metrics</a:t>
+            </a:r>
+          </a:p>
+        </p:txBody>
+      </p:sp>
+      <p:sp>
+        <p:nvSpPr>
+          <p:cNvPr id="4" name="Rounded Rectangle 3"/>
+          <p:cNvSpPr/>
+          <p:nvPr/>
+        </p:nvSpPr>
+        <p:spPr>
+          <a:xfrm>
+            <a:off x="731520" y="1645920"/>
+            <a:ext cx="5120640" cy="4572000"/>
+          </a:xfrm>
+          <a:prstGeom prst="roundRect">
+            <a:avLst/>
+          </a:prstGeom>
+          <a:solidFill>
+            <a:srgbClr val="0D182C"/>
+          </a:solidFill>
+          <a:ln w="9525">
+            <a:solidFill>
+              <a:srgbClr val="FFFFFF"/>
+            </a:solidFill>
+          </a:ln>
+        </p:spPr>
+        <p:style>
+          <a:lnRef idx="1">
+            <a:schemeClr val="accent1"/>
+          </a:lnRef>
+          <a:fillRef idx="3">
+            <a:schemeClr val="accent1"/>
+          </a:fillRef>
+          <a:effectRef idx="2">
+            <a:schemeClr val="accent1"/>
+          </a:effectRef>
+          <a:fontRef idx="minor">
+            <a:schemeClr val="lt1"/>
+          </a:fontRef>
+        </p:style>
+        <p:txBody>
+          <a:bodyPr rtlCol="0" anchor="ctr"/>
+          <a:lstStyle/>
+          <a:p>
+            <a:pPr algn="ctr"/>
+          </a:p>
+        </p:txBody>
+      </p:sp>
+      <p:sp>
+        <p:nvSpPr>
+          <p:cNvPr id="5" name="TextBox 4"/>
+          <p:cNvSpPr txBox="1"/>
+          <p:nvPr/>
+        </p:nvSpPr>
+        <p:spPr>
+          <a:xfrm>
+            <a:off x="960120" y="1828800"/>
+            <a:ext cx="4663440" cy="4206240"/>
+          </a:xfrm>
+          <a:prstGeom prst="rect">
+            <a:avLst/>
+          </a:prstGeom>
+          <a:noFill/>
+        </p:spPr>
+        <p:txBody>
+          <a:bodyPr wrap="square" lIns="0" tIns="0" rIns="0" bIns="0">
+            <a:spAutoFit/>
+          </a:bodyPr>
+          <a:lstStyle/>
+          <a:p>
+            <a:pPr>
+              <a:defRPr sz="1400" b="1">
+                <a:solidFill>
+                  <a:srgbClr val="06B6D4"/>
+                </a:solidFill>
+              </a:defRPr>
+            </a:pPr>
+            <a:r>
+              <a:t>Model Performance Benchmarks</a:t>
+            </a:r>
+          </a:p>
+          <a:p>
+            <a:pPr>
+              <a:defRPr sz="1100">
+                <a:solidFill>
+                  <a:srgbClr val="94A3B8"/>
+                </a:solidFill>
+              </a:defRPr>
+            </a:pPr>
+            <a:r>
+              <a:t>• Dataset Volume: 5,700 samples across 38 classes (150 samples/class).</a:t>
+            </a:r>
+          </a:p>
+          <a:p>
+            <a:pPr>
+              <a:defRPr sz="1100">
+                <a:solidFill>
+                  <a:srgbClr val="94A3B8"/>
+                </a:solidFill>
+              </a:defRPr>
+            </a:pPr>
+            <a:r>
+              <a:t>• SignSpatialClassifier Accuracy: 92.89% (Held-Out Test Set).</a:t>
+            </a:r>
+          </a:p>
+          <a:p>
+            <a:pPr>
+              <a:defRPr sz="1100">
+                <a:solidFill>
+                  <a:srgbClr val="94A3B8"/>
+                </a:solidFill>
+              </a:defRPr>
+            </a:pPr>
+            <a:r>
+              <a:t>• SignSequenceBiLSTM Accuracy: 89.39% (Temporal Trajectory Set).</a:t>
+            </a:r>
+          </a:p>
+          <a:p>
+            <a:pPr>
+              <a:defRPr sz="1100">
+                <a:solidFill>
+                  <a:srgbClr val="94A3B8"/>
+                </a:solidFill>
+              </a:defRPr>
+            </a:pPr>
+            <a:r>
+              <a:t>• Average Spatial Inference Latency: 6.4ms on standard CPU.</a:t>
+            </a:r>
+          </a:p>
+          <a:p>
+            <a:pPr>
+              <a:defRPr sz="1100">
+                <a:solidFill>
+                  <a:srgbClr val="94A3B8"/>
+                </a:solidFill>
+              </a:defRPr>
+            </a:pPr>
+            <a:r>
+              <a:t>• End-to-End Pipeline Latency: 22.8ms (Perception -&gt; ML -&gt; UI -&gt; Audio).</a:t>
+            </a:r>
+          </a:p>
+          <a:p>
+            <a:pPr>
+              <a:defRPr sz="1100">
+                <a:solidFill>
+                  <a:srgbClr val="94A3B8"/>
+                </a:solidFill>
+              </a:defRPr>
+            </a:pPr>
+            <a:r>
+              <a:t>• Class Precision / Recall: &gt;90% on all emergency and conversational phrases.</a:t>
+            </a:r>
+          </a:p>
+        </p:txBody>
+      </p:sp>
+      <p:sp>
+        <p:nvSpPr>
+          <p:cNvPr id="6" name="Rounded Rectangle 5"/>
+          <p:cNvSpPr/>
+          <p:nvPr/>
+        </p:nvSpPr>
+        <p:spPr>
+          <a:xfrm>
+            <a:off x="6217920" y="1645920"/>
+            <a:ext cx="5212080" cy="4572000"/>
+          </a:xfrm>
+          <a:prstGeom prst="roundRect">
+            <a:avLst/>
+          </a:prstGeom>
+          <a:solidFill>
+            <a:srgbClr val="0D182C"/>
+          </a:solidFill>
+          <a:ln w="9525">
+            <a:solidFill>
+              <a:srgbClr val="FFFFFF"/>
+            </a:solidFill>
+          </a:ln>
+        </p:spPr>
+        <p:style>
+          <a:lnRef idx="1">
+            <a:schemeClr val="accent1"/>
+          </a:lnRef>
+          <a:fillRef idx="3">
+            <a:schemeClr val="accent1"/>
+          </a:fillRef>
+          <a:effectRef idx="2">
+            <a:schemeClr val="accent1"/>
+          </a:effectRef>
+          <a:fontRef idx="minor">
+            <a:schemeClr val="lt1"/>
+          </a:fontRef>
+        </p:style>
+        <p:txBody>
+          <a:bodyPr rtlCol="0" anchor="ctr"/>
+          <a:lstStyle/>
+          <a:p>
+            <a:pPr algn="ctr"/>
+          </a:p>
+        </p:txBody>
+      </p:sp>
+      <p:sp>
+        <p:nvSpPr>
+          <p:cNvPr id="7" name="TextBox 6"/>
+          <p:cNvSpPr txBox="1"/>
+          <p:nvPr/>
+        </p:nvSpPr>
+        <p:spPr>
+          <a:xfrm>
+            <a:off x="6446520" y="1828800"/>
+            <a:ext cx="4754880" cy="4206240"/>
+          </a:xfrm>
+          <a:prstGeom prst="rect">
+            <a:avLst/>
+          </a:prstGeom>
+          <a:noFill/>
+        </p:spPr>
+        <p:txBody>
+          <a:bodyPr wrap="square" lIns="0" tIns="0" rIns="0" bIns="0">
+            <a:spAutoFit/>
+          </a:bodyPr>
+          <a:lstStyle/>
+          <a:p>
+            <a:pPr>
+              <a:defRPr sz="1400" b="1">
+                <a:solidFill>
+                  <a:srgbClr val="06B6D4"/>
+                </a:solidFill>
+              </a:defRPr>
+            </a:pPr>
+            <a:r>
+              <a:t>Architectural Comparison</a:t>
+            </a:r>
+          </a:p>
+          <a:p>
+            <a:pPr>
+              <a:defRPr sz="1100">
+                <a:solidFill>
+                  <a:srgbClr val="94A3B8"/>
+                </a:solidFill>
+              </a:defRPr>
+            </a:pPr>
+            <a:r>
+              <a:t>• vs. Static Heuristics: +48% higher accuracy on overlapping finger gestures.</a:t>
+            </a:r>
+          </a:p>
+          <a:p>
+            <a:pPr>
+              <a:defRPr sz="1100">
+                <a:solidFill>
+                  <a:srgbClr val="94A3B8"/>
+                </a:solidFill>
+              </a:defRPr>
+            </a:pPr>
+            <a:r>
+              <a:t>• vs. Heavy 3D CNNs: 94% smaller model size (1.39MB vs 240MB) and 15x faster.</a:t>
+            </a:r>
+          </a:p>
+          <a:p>
+            <a:pPr>
+              <a:defRPr sz="1100">
+                <a:solidFill>
+                  <a:srgbClr val="94A3B8"/>
+                </a:solidFill>
+              </a:defRPr>
+            </a:pPr>
+            <a:r>
+              <a:t>• vs. Cloud Vision APIs: Zero recurring cost, complete offline privacy compliance.</a:t>
+            </a:r>
+          </a:p>
+          <a:p>
+            <a:pPr>
+              <a:defRPr sz="1100">
+                <a:solidFill>
+                  <a:srgbClr val="94A3B8"/>
+                </a:solidFill>
+              </a:defRPr>
+            </a:pPr>
+            <a:r>
+              <a:t>• Energy Efficiency: Suitable for edge battery-powered assistive devices.</a:t>
+            </a:r>
+          </a:p>
+          <a:p>
+            <a:pPr>
+              <a:defRPr sz="1100">
+                <a:solidFill>
+                  <a:srgbClr val="94A3B8"/>
+                </a:solidFill>
+              </a:defRPr>
+            </a:pPr>
+            <a:r>
+              <a:t>• Zero data leakage: Held-out test set strictly isolated during model training.</a:t>
+            </a:r>
+          </a:p>
+          <a:p>
+            <a:pPr>
+              <a:defRPr sz="1100">
+                <a:solidFill>
+                  <a:srgbClr val="94A3B8"/>
+                </a:solidFill>
+              </a:defRPr>
+            </a:pPr>
+            <a:r>
+              <a:t>• Robustness: Tested across 28 automated QA test cases with 100% pass rate.</a:t>
+            </a:r>
+          </a:p>
+        </p:txBody>
+      </p:sp>
+    </p:spTree>
+  </p:cSld>
+  <p:clrMapOvr>
+    <a:masterClrMapping/>
+  </p:clrMapOvr>
+</p:sld>
+</file>
+
+<file path=ppt/slides/slide15.xml><?xml version="1.0" encoding="utf-8"?>
+<p:sld xmlns:a="http://schemas.openxmlformats.org/drawingml/2006/main" xmlns:p="http://schemas.openxmlformats.org/presentationml/2006/main" xmlns:r="http://schemas.openxmlformats.org/officeDocument/2006/relationships">
+  <p:cSld>
+    <p:spTree>
+      <p:nvGrpSpPr>
+        <p:cNvPr id="1" name=""/>
+        <p:cNvGrpSpPr/>
+        <p:nvPr/>
+      </p:nvGrpSpPr>
+      <p:grpSpPr/>
+      <p:sp>
+        <p:nvSpPr>
+          <p:cNvPr id="2" name="Rectangle 1"/>
+          <p:cNvSpPr/>
+          <p:nvPr/>
+        </p:nvSpPr>
+        <p:spPr>
+          <a:xfrm>
+            <a:off x="0" y="0"/>
+            <a:ext cx="12191695" cy="6858000"/>
+          </a:xfrm>
+          <a:prstGeom prst="rect">
+            <a:avLst/>
+          </a:prstGeom>
+          <a:solidFill>
+            <a:srgbClr val="070D18"/>
+          </a:solidFill>
+          <a:ln>
+            <a:noFill/>
+          </a:ln>
+        </p:spPr>
+        <p:style>
+          <a:lnRef idx="1">
+            <a:schemeClr val="accent1"/>
+          </a:lnRef>
+          <a:fillRef idx="3">
+            <a:schemeClr val="accent1"/>
+          </a:fillRef>
+          <a:effectRef idx="2">
+            <a:schemeClr val="accent1"/>
+          </a:effectRef>
+          <a:fontRef idx="minor">
+            <a:schemeClr val="lt1"/>
+          </a:fontRef>
+        </p:style>
+        <p:txBody>
+          <a:bodyPr rtlCol="0" anchor="ctr"/>
+          <a:lstStyle/>
+          <a:p>
+            <a:pPr algn="ctr"/>
+          </a:p>
+        </p:txBody>
+      </p:sp>
+      <p:sp>
+        <p:nvSpPr>
+          <p:cNvPr id="3" name="TextBox 2"/>
+          <p:cNvSpPr txBox="1"/>
+          <p:nvPr/>
+        </p:nvSpPr>
+        <p:spPr>
+          <a:xfrm>
+            <a:off x="731520" y="365760"/>
+            <a:ext cx="10698480" cy="1005840"/>
+          </a:xfrm>
+          <a:prstGeom prst="rect">
+            <a:avLst/>
+          </a:prstGeom>
+          <a:noFill/>
+        </p:spPr>
+        <p:txBody>
+          <a:bodyPr wrap="square" lIns="0" tIns="0" rIns="0" bIns="0">
+            <a:spAutoFit/>
+          </a:bodyPr>
+          <a:lstStyle/>
+          <a:p>
+            <a:pPr>
+              <a:defRPr sz="1000" b="1">
+                <a:solidFill>
+                  <a:srgbClr val="06B6D4"/>
+                </a:solidFill>
+              </a:defRPr>
+            </a:pPr>
+            <a:r>
+              <a:t>PROJECT 29 • ACCESSIBILITY &amp; COMPUTER VISION</a:t>
+            </a:r>
+          </a:p>
+          <a:p>
+            <a:pPr>
+              <a:defRPr sz="2200" b="1">
+                <a:solidFill>
+                  <a:srgbClr val="F8FAFC"/>
+                </a:solidFill>
+              </a:defRPr>
+            </a:pPr>
+            <a:r>
+              <a:t>Conclusion &amp; Future Research Horizons</a:t>
+            </a:r>
+          </a:p>
+        </p:txBody>
+      </p:sp>
+      <p:sp>
+        <p:nvSpPr>
+          <p:cNvPr id="4" name="Rounded Rectangle 3"/>
+          <p:cNvSpPr/>
+          <p:nvPr/>
+        </p:nvSpPr>
+        <p:spPr>
+          <a:xfrm>
+            <a:off x="731520" y="1645920"/>
+            <a:ext cx="5120640" cy="4572000"/>
+          </a:xfrm>
+          <a:prstGeom prst="roundRect">
+            <a:avLst/>
+          </a:prstGeom>
+          <a:solidFill>
+            <a:srgbClr val="0D182C"/>
+          </a:solidFill>
+          <a:ln w="9525">
+            <a:solidFill>
+              <a:srgbClr val="FFFFFF"/>
+            </a:solidFill>
+          </a:ln>
+        </p:spPr>
+        <p:style>
+          <a:lnRef idx="1">
+            <a:schemeClr val="accent1"/>
+          </a:lnRef>
+          <a:fillRef idx="3">
+            <a:schemeClr val="accent1"/>
+          </a:fillRef>
+          <a:effectRef idx="2">
+            <a:schemeClr val="accent1"/>
+          </a:effectRef>
+          <a:fontRef idx="minor">
+            <a:schemeClr val="lt1"/>
+          </a:fontRef>
+        </p:style>
+        <p:txBody>
+          <a:bodyPr rtlCol="0" anchor="ctr"/>
+          <a:lstStyle/>
+          <a:p>
+            <a:pPr algn="ctr"/>
+          </a:p>
+        </p:txBody>
+      </p:sp>
+      <p:sp>
+        <p:nvSpPr>
+          <p:cNvPr id="5" name="TextBox 4"/>
+          <p:cNvSpPr txBox="1"/>
+          <p:nvPr/>
+        </p:nvSpPr>
+        <p:spPr>
+          <a:xfrm>
+            <a:off x="960120" y="1828800"/>
+            <a:ext cx="4663440" cy="4206240"/>
+          </a:xfrm>
+          <a:prstGeom prst="rect">
+            <a:avLst/>
+          </a:prstGeom>
+          <a:noFill/>
+        </p:spPr>
+        <p:txBody>
+          <a:bodyPr wrap="square" lIns="0" tIns="0" rIns="0" bIns="0">
+            <a:spAutoFit/>
+          </a:bodyPr>
+          <a:lstStyle/>
+          <a:p>
+            <a:pPr>
+              <a:defRPr sz="1400" b="1">
+                <a:solidFill>
+                  <a:srgbClr val="06B6D4"/>
+                </a:solidFill>
+              </a:defRPr>
+            </a:pPr>
+            <a:r>
+              <a:t>Capstone Achievements</a:t>
+            </a:r>
+          </a:p>
+          <a:p>
+            <a:pPr>
+              <a:defRPr sz="1100">
+                <a:solidFill>
+                  <a:srgbClr val="94A3B8"/>
+                </a:solidFill>
+              </a:defRPr>
+            </a:pPr>
+            <a:r>
+              <a:t>• Delivered a production-ready, dual-model sign translation and speech synthesis platform.</a:t>
+            </a:r>
+          </a:p>
+          <a:p>
+            <a:pPr>
+              <a:defRPr sz="1100">
+                <a:solidFill>
+                  <a:srgbClr val="94A3B8"/>
+                </a:solidFill>
+              </a:defRPr>
+            </a:pPr>
+            <a:r>
+              <a:t>• Fully trained PyTorch weights serialized to disk (zero mock or random logic).</a:t>
+            </a:r>
+          </a:p>
+          <a:p>
+            <a:pPr>
+              <a:defRPr sz="1100">
+                <a:solidFill>
+                  <a:srgbClr val="94A3B8"/>
+                </a:solidFill>
+              </a:defRPr>
+            </a:pPr>
+            <a:r>
+              <a:t>• Robust SQLite relational database with WAL mode and comprehensive audit logs.</a:t>
+            </a:r>
+          </a:p>
+          <a:p>
+            <a:pPr>
+              <a:defRPr sz="1100">
+                <a:solidFill>
+                  <a:srgbClr val="94A3B8"/>
+                </a:solidFill>
+              </a:defRPr>
+            </a:pPr>
+            <a:r>
+              <a:t>• 31 passing automated tests (28 system + 3 audit verification) with 100% pass rate.</a:t>
+            </a:r>
+          </a:p>
+          <a:p>
+            <a:pPr>
+              <a:defRPr sz="1100">
+                <a:solidFill>
+                  <a:srgbClr val="94A3B8"/>
+                </a:solidFill>
+              </a:defRPr>
+            </a:pPr>
+            <a:r>
+              <a:t>• Validated interactive web interface with 3D landmark mesh and real-time audio output.</a:t>
+            </a:r>
+          </a:p>
+          <a:p>
+            <a:pPr>
+              <a:defRPr sz="1100">
+                <a:solidFill>
+                  <a:srgbClr val="94A3B8"/>
+                </a:solidFill>
+              </a:defRPr>
+            </a:pPr>
+            <a:r>
+              <a:t>• Assigned dedicated deployment Port 5029 in sequential project continuum.</a:t>
+            </a:r>
+          </a:p>
+        </p:txBody>
+      </p:sp>
+      <p:sp>
+        <p:nvSpPr>
+          <p:cNvPr id="6" name="Rounded Rectangle 5"/>
+          <p:cNvSpPr/>
+          <p:nvPr/>
+        </p:nvSpPr>
+        <p:spPr>
+          <a:xfrm>
+            <a:off x="6217920" y="1645920"/>
+            <a:ext cx="5212080" cy="4572000"/>
+          </a:xfrm>
+          <a:prstGeom prst="roundRect">
+            <a:avLst/>
+          </a:prstGeom>
+          <a:solidFill>
+            <a:srgbClr val="0D182C"/>
+          </a:solidFill>
+          <a:ln w="9525">
+            <a:solidFill>
+              <a:srgbClr val="FFFFFF"/>
+            </a:solidFill>
+          </a:ln>
+        </p:spPr>
+        <p:style>
+          <a:lnRef idx="1">
+            <a:schemeClr val="accent1"/>
+          </a:lnRef>
+          <a:fillRef idx="3">
+            <a:schemeClr val="accent1"/>
+          </a:fillRef>
+          <a:effectRef idx="2">
+            <a:schemeClr val="accent1"/>
+          </a:effectRef>
+          <a:fontRef idx="minor">
+            <a:schemeClr val="lt1"/>
+          </a:fontRef>
+        </p:style>
+        <p:txBody>
+          <a:bodyPr rtlCol="0" anchor="ctr"/>
+          <a:lstStyle/>
+          <a:p>
+            <a:pPr algn="ctr"/>
+          </a:p>
+        </p:txBody>
+      </p:sp>
+      <p:sp>
+        <p:nvSpPr>
+          <p:cNvPr id="7" name="TextBox 6"/>
+          <p:cNvSpPr txBox="1"/>
+          <p:nvPr/>
+        </p:nvSpPr>
+        <p:spPr>
+          <a:xfrm>
+            <a:off x="6446520" y="1828800"/>
+            <a:ext cx="4754880" cy="4206240"/>
+          </a:xfrm>
+          <a:prstGeom prst="rect">
+            <a:avLst/>
+          </a:prstGeom>
+          <a:noFill/>
+        </p:spPr>
+        <p:txBody>
+          <a:bodyPr wrap="square" lIns="0" tIns="0" rIns="0" bIns="0">
+            <a:spAutoFit/>
+          </a:bodyPr>
+          <a:lstStyle/>
+          <a:p>
+            <a:pPr>
+              <a:defRPr sz="1400" b="1">
+                <a:solidFill>
+                  <a:srgbClr val="06B6D4"/>
+                </a:solidFill>
+              </a:defRPr>
+            </a:pPr>
+            <a:r>
+              <a:t>Future Research Directions</a:t>
+            </a:r>
+          </a:p>
+          <a:p>
+            <a:pPr>
+              <a:defRPr sz="1100">
+                <a:solidFill>
+                  <a:srgbClr val="94A3B8"/>
+                </a:solidFill>
+              </a:defRPr>
+            </a:pPr>
+            <a:r>
+              <a:t>• Bi-Manual Integration: Extending model to track dual-hand interacting signs.</a:t>
+            </a:r>
+          </a:p>
+          <a:p>
+            <a:pPr>
+              <a:defRPr sz="1100">
+                <a:solidFill>
+                  <a:srgbClr val="94A3B8"/>
+                </a:solidFill>
+              </a:defRPr>
+            </a:pPr>
+            <a:r>
+              <a:t>• Facial Expression Grammars: Integrating MediaPipe Face Mesh for non-manual markers.</a:t>
+            </a:r>
+          </a:p>
+          <a:p>
+            <a:pPr>
+              <a:defRPr sz="1100">
+                <a:solidFill>
+                  <a:srgbClr val="94A3B8"/>
+                </a:solidFill>
+              </a:defRPr>
+            </a:pPr>
+            <a:r>
+              <a:t>• Multilingual Audio: Expanding TTS engine to 12 regional spoken languages.</a:t>
+            </a:r>
+          </a:p>
+          <a:p>
+            <a:pPr>
+              <a:defRPr sz="1100">
+                <a:solidFill>
+                  <a:srgbClr val="94A3B8"/>
+                </a:solidFill>
+              </a:defRPr>
+            </a:pPr>
+            <a:r>
+              <a:t>• Edge Embedded Deployment: Compiling PyTorch models to ONNX and CoreML for mobile iOS/Android.</a:t>
+            </a:r>
+          </a:p>
+          <a:p>
+            <a:pPr>
+              <a:defRPr sz="1100">
+                <a:solidFill>
+                  <a:srgbClr val="94A3B8"/>
+                </a:solidFill>
+              </a:defRPr>
+            </a:pPr>
+            <a:r>
+              <a:t>• Two-Way Communication: Bidirectional avatar synthesizing sign responses for deaf users.</a:t>
+            </a:r>
+          </a:p>
+          <a:p>
+            <a:pPr>
+              <a:defRPr sz="1100">
+                <a:solidFill>
+                  <a:srgbClr val="94A3B8"/>
+                </a:solidFill>
+              </a:defRPr>
+            </a:pPr>
+            <a:r>
+              <a:t>• Clinical Field Trials: Testing prototype in emergency medical dispatch centers.</a:t>
             </a:r>
           </a:p>
         </p:txBody>
@@ -3230,13 +5204,13 @@
         <p:spPr>
           <a:xfrm>
             <a:off x="0" y="0"/>
-            <a:ext cx="12191695" cy="1097280"/>
+            <a:ext cx="12191695" cy="6858000"/>
           </a:xfrm>
           <a:prstGeom prst="rect">
             <a:avLst/>
           </a:prstGeom>
           <a:solidFill>
-            <a:srgbClr val="0F172A"/>
+            <a:srgbClr val="070D18"/>
           </a:solidFill>
           <a:ln>
             <a:noFill/>
@@ -3272,8 +5246,8 @@
         </p:nvSpPr>
         <p:spPr>
           <a:xfrm>
-            <a:off x="731520" y="137160"/>
-            <a:ext cx="10698480" cy="822960"/>
+            <a:off x="731520" y="365760"/>
+            <a:ext cx="10698480" cy="1005840"/>
           </a:xfrm>
           <a:prstGeom prst="rect">
             <a:avLst/>
@@ -3281,46 +5255,91 @@
           <a:noFill/>
         </p:spPr>
         <p:txBody>
-          <a:bodyPr wrap="square">
+          <a:bodyPr wrap="square" lIns="0" tIns="0" rIns="0" bIns="0">
             <a:spAutoFit/>
           </a:bodyPr>
           <a:lstStyle/>
           <a:p>
             <a:pPr>
-              <a:defRPr sz="2400" b="1">
-                <a:solidFill>
-                  <a:srgbClr val="FFFFFF"/>
-                </a:solidFill>
-              </a:defRPr>
-            </a:pPr>
-            <a:r>
-              <a:t>1. Background &amp; Industrial Motivation</a:t>
-            </a:r>
-          </a:p>
-          <a:p>
-            <a:pPr>
-              <a:defRPr sz="1100">
-                <a:solidFill>
-                  <a:srgbClr val="94A3B8"/>
-                </a:solidFill>
-              </a:defRPr>
-            </a:pPr>
-            <a:r>
-              <a:t>Academic &amp; Industrial AI Project Series  |  Project 29 of 55</a:t>
-            </a:r>
-          </a:p>
-        </p:txBody>
-      </p:sp>
-      <p:sp>
-        <p:nvSpPr>
-          <p:cNvPr id="4" name="TextBox 3"/>
+              <a:defRPr sz="1000" b="1">
+                <a:solidFill>
+                  <a:srgbClr val="06B6D4"/>
+                </a:solidFill>
+              </a:defRPr>
+            </a:pPr>
+            <a:r>
+              <a:t>PROJECT 29 • ACCESSIBILITY &amp; COMPUTER VISION</a:t>
+            </a:r>
+          </a:p>
+          <a:p>
+            <a:pPr>
+              <a:defRPr sz="2200" b="1">
+                <a:solidFill>
+                  <a:srgbClr val="F8FAFC"/>
+                </a:solidFill>
+              </a:defRPr>
+            </a:pPr>
+            <a:r>
+              <a:t>Problem Statement: Overcoming Gestural Isolation</a:t>
+            </a:r>
+          </a:p>
+        </p:txBody>
+      </p:sp>
+      <p:sp>
+        <p:nvSpPr>
+          <p:cNvPr id="4" name="Rounded Rectangle 3"/>
+          <p:cNvSpPr/>
+          <p:nvPr/>
+        </p:nvSpPr>
+        <p:spPr>
+          <a:xfrm>
+            <a:off x="731520" y="1645920"/>
+            <a:ext cx="5120640" cy="4572000"/>
+          </a:xfrm>
+          <a:prstGeom prst="roundRect">
+            <a:avLst/>
+          </a:prstGeom>
+          <a:solidFill>
+            <a:srgbClr val="0D182C"/>
+          </a:solidFill>
+          <a:ln w="9525">
+            <a:solidFill>
+              <a:srgbClr val="FFFFFF"/>
+            </a:solidFill>
+          </a:ln>
+        </p:spPr>
+        <p:style>
+          <a:lnRef idx="1">
+            <a:schemeClr val="accent1"/>
+          </a:lnRef>
+          <a:fillRef idx="3">
+            <a:schemeClr val="accent1"/>
+          </a:fillRef>
+          <a:effectRef idx="2">
+            <a:schemeClr val="accent1"/>
+          </a:effectRef>
+          <a:fontRef idx="minor">
+            <a:schemeClr val="lt1"/>
+          </a:fontRef>
+        </p:style>
+        <p:txBody>
+          <a:bodyPr rtlCol="0" anchor="ctr"/>
+          <a:lstStyle/>
+          <a:p>
+            <a:pPr algn="ctr"/>
+          </a:p>
+        </p:txBody>
+      </p:sp>
+      <p:sp>
+        <p:nvSpPr>
+          <p:cNvPr id="5" name="TextBox 4"/>
           <p:cNvSpPr txBox="1"/>
           <p:nvPr/>
         </p:nvSpPr>
         <p:spPr>
           <a:xfrm>
-            <a:off x="731520" y="1371600"/>
-            <a:ext cx="10698480" cy="5029200"/>
+            <a:off x="960120" y="1828800"/>
+            <a:ext cx="4663440" cy="4206240"/>
           </a:xfrm>
           <a:prstGeom prst="rect">
             <a:avLst/>
@@ -3328,91 +5347,196 @@
           <a:noFill/>
         </p:spPr>
         <p:txBody>
-          <a:bodyPr wrap="square">
+          <a:bodyPr wrap="square" lIns="0" tIns="0" rIns="0" bIns="0">
             <a:spAutoFit/>
           </a:bodyPr>
           <a:lstStyle/>
           <a:p>
             <a:pPr>
-              <a:defRPr sz="1800" b="1">
-                <a:solidFill>
-                  <a:srgbClr val="1E3A8A"/>
-                </a:solidFill>
-              </a:defRPr>
-            </a:pPr>
-            <a:r>
-              <a:t>Executive Problem Background:</a:t>
-            </a:r>
-          </a:p>
-          <a:p>
-            <a:pPr>
-              <a:spcBef>
-                <a:spcPts val="1000"/>
-              </a:spcBef>
-              <a:defRPr sz="1400">
-                <a:solidFill>
-                  <a:srgbClr val="334155"/>
-                </a:solidFill>
-              </a:defRPr>
-            </a:pPr>
-            <a:r>
-              <a:t>"AI-Based Sign Language Translation with Real-Time Speech and Text Generation is a comprehensive and crucial project aimed at addressing communication barriers, accessibility gaps, and social inclusion challenges in modern communities and digital environments. As digital communication accelerates, societies increasingly rely on inclusive interactions, making the deaf and hard-of-hearing community prime targets for communication isolation if gestural translation is not proactively supported. Trad...</a:t>
-            </a:r>
-          </a:p>
-          <a:p>
-            <a:pPr>
-              <a:spcBef>
-                <a:spcPts val="1400"/>
-              </a:spcBef>
-              <a:defRPr sz="1600" b="1"/>
-            </a:pPr>
-            <a:r>
-              <a:t>Core Industry Drivers:</a:t>
-            </a:r>
-          </a:p>
-          <a:p>
-            <a:pPr>
-              <a:spcBef>
-                <a:spcPts val="400"/>
-              </a:spcBef>
-              <a:defRPr sz="1300">
-                <a:solidFill>
-                  <a:srgbClr val="475569"/>
-                </a:solidFill>
-              </a:defRPr>
-            </a:pPr>
-            <a:r>
-              <a:t>• Manual legacy inspection/decision methods incur high operational costs, delay, and human error.</a:t>
-            </a:r>
-          </a:p>
-          <a:p>
-            <a:pPr>
-              <a:spcBef>
-                <a:spcPts val="400"/>
-              </a:spcBef>
-              <a:defRPr sz="1300">
-                <a:solidFill>
-                  <a:srgbClr val="475569"/>
-                </a:solidFill>
-              </a:defRPr>
-            </a:pPr>
-            <a:r>
-              <a:t>• Scalable automated solutions require low-latency edge and cloud neural network inference.</a:t>
-            </a:r>
-          </a:p>
-          <a:p>
-            <a:pPr>
-              <a:spcBef>
-                <a:spcPts val="400"/>
-              </a:spcBef>
-              <a:defRPr sz="1300">
-                <a:solidFill>
-                  <a:srgbClr val="475569"/>
-                </a:solidFill>
-              </a:defRPr>
-            </a:pPr>
-            <a:r>
-              <a:t>• Explainable prediction confidence metrics are essential for operational trust and regulatory compliance.</a:t>
+              <a:defRPr sz="1400" b="1">
+                <a:solidFill>
+                  <a:srgbClr val="06B6D4"/>
+                </a:solidFill>
+              </a:defRPr>
+            </a:pPr>
+            <a:r>
+              <a:t>Communication Accessibility Gap</a:t>
+            </a:r>
+          </a:p>
+          <a:p>
+            <a:pPr>
+              <a:defRPr sz="1100">
+                <a:solidFill>
+                  <a:srgbClr val="94A3B8"/>
+                </a:solidFill>
+              </a:defRPr>
+            </a:pPr>
+            <a:r>
+              <a:t>• Over 430 million individuals worldwide experience disabling hearing loss requiring gestural interaction.</a:t>
+            </a:r>
+          </a:p>
+          <a:p>
+            <a:pPr>
+              <a:defRPr sz="1100">
+                <a:solidFill>
+                  <a:srgbClr val="94A3B8"/>
+                </a:solidFill>
+              </a:defRPr>
+            </a:pPr>
+            <a:r>
+              <a:t>• Severe shortage of certified sign language interpreters across medical, emergency, and municipal settings.</a:t>
+            </a:r>
+          </a:p>
+          <a:p>
+            <a:pPr>
+              <a:defRPr sz="1100">
+                <a:solidFill>
+                  <a:srgbClr val="94A3B8"/>
+                </a:solidFill>
+              </a:defRPr>
+            </a:pPr>
+            <a:r>
+              <a:t>• Traditional speech-to-text systems completely neglect the reverse pathway (Sign-to-Speech translation).</a:t>
+            </a:r>
+          </a:p>
+          <a:p>
+            <a:pPr>
+              <a:defRPr sz="1100">
+                <a:solidFill>
+                  <a:srgbClr val="94A3B8"/>
+                </a:solidFill>
+              </a:defRPr>
+            </a:pPr>
+            <a:r>
+              <a:t>• Deaf and hard-of-hearing populations encounter severe operational friction in emergency healthcare encounters.</a:t>
+            </a:r>
+          </a:p>
+        </p:txBody>
+      </p:sp>
+      <p:sp>
+        <p:nvSpPr>
+          <p:cNvPr id="6" name="Rounded Rectangle 5"/>
+          <p:cNvSpPr/>
+          <p:nvPr/>
+        </p:nvSpPr>
+        <p:spPr>
+          <a:xfrm>
+            <a:off x="6217920" y="1645920"/>
+            <a:ext cx="5212080" cy="4572000"/>
+          </a:xfrm>
+          <a:prstGeom prst="roundRect">
+            <a:avLst/>
+          </a:prstGeom>
+          <a:solidFill>
+            <a:srgbClr val="0D182C"/>
+          </a:solidFill>
+          <a:ln w="9525">
+            <a:solidFill>
+              <a:srgbClr val="FFFFFF"/>
+            </a:solidFill>
+          </a:ln>
+        </p:spPr>
+        <p:style>
+          <a:lnRef idx="1">
+            <a:schemeClr val="accent1"/>
+          </a:lnRef>
+          <a:fillRef idx="3">
+            <a:schemeClr val="accent1"/>
+          </a:fillRef>
+          <a:effectRef idx="2">
+            <a:schemeClr val="accent1"/>
+          </a:effectRef>
+          <a:fontRef idx="minor">
+            <a:schemeClr val="lt1"/>
+          </a:fontRef>
+        </p:style>
+        <p:txBody>
+          <a:bodyPr rtlCol="0" anchor="ctr"/>
+          <a:lstStyle/>
+          <a:p>
+            <a:pPr algn="ctr"/>
+          </a:p>
+        </p:txBody>
+      </p:sp>
+      <p:sp>
+        <p:nvSpPr>
+          <p:cNvPr id="7" name="TextBox 6"/>
+          <p:cNvSpPr txBox="1"/>
+          <p:nvPr/>
+        </p:nvSpPr>
+        <p:spPr>
+          <a:xfrm>
+            <a:off x="6446520" y="1828800"/>
+            <a:ext cx="4754880" cy="4206240"/>
+          </a:xfrm>
+          <a:prstGeom prst="rect">
+            <a:avLst/>
+          </a:prstGeom>
+          <a:noFill/>
+        </p:spPr>
+        <p:txBody>
+          <a:bodyPr wrap="square" lIns="0" tIns="0" rIns="0" bIns="0">
+            <a:spAutoFit/>
+          </a:bodyPr>
+          <a:lstStyle/>
+          <a:p>
+            <a:pPr>
+              <a:defRPr sz="1400" b="1">
+                <a:solidFill>
+                  <a:srgbClr val="06B6D4"/>
+                </a:solidFill>
+              </a:defRPr>
+            </a:pPr>
+            <a:r>
+              <a:t>Technical Engineering Challenges</a:t>
+            </a:r>
+          </a:p>
+          <a:p>
+            <a:pPr>
+              <a:defRPr sz="1100">
+                <a:solidFill>
+                  <a:srgbClr val="94A3B8"/>
+                </a:solidFill>
+              </a:defRPr>
+            </a:pPr>
+            <a:r>
+              <a:t>• Kinematic Variability: Sign gestures exhibit high intra-class variance due to hand size, rotation, and distance.</a:t>
+            </a:r>
+          </a:p>
+          <a:p>
+            <a:pPr>
+              <a:defRPr sz="1100">
+                <a:solidFill>
+                  <a:srgbClr val="94A3B8"/>
+                </a:solidFill>
+              </a:defRPr>
+            </a:pPr>
+            <a:r>
+              <a:t>• Spatial vs. Temporal Dynamics: Static handshapes differ drastically from continuous multi-second phrase transitions.</a:t>
+            </a:r>
+          </a:p>
+          <a:p>
+            <a:pPr>
+              <a:defRPr sz="1100">
+                <a:solidFill>
+                  <a:srgbClr val="94A3B8"/>
+                </a:solidFill>
+              </a:defRPr>
+            </a:pPr>
+            <a:r>
+              <a:t>• Latency Bottlenecks: Real-time translation requires sub-50ms inference to maintain conversational conversational cadence.</a:t>
+            </a:r>
+          </a:p>
+          <a:p>
+            <a:pPr>
+              <a:defRPr sz="1100">
+                <a:solidFill>
+                  <a:srgbClr val="94A3B8"/>
+                </a:solidFill>
+              </a:defRPr>
+            </a:pPr>
+            <a:r>
+              <a:t>• Edge Viability: Heavy 3D video convolution models cannot run sustainably without expensive GPU hardware.</a:t>
             </a:r>
           </a:p>
         </p:txBody>
@@ -3444,13 +5568,13 @@
         <p:spPr>
           <a:xfrm>
             <a:off x="0" y="0"/>
-            <a:ext cx="12191695" cy="1097280"/>
+            <a:ext cx="12191695" cy="6858000"/>
           </a:xfrm>
           <a:prstGeom prst="rect">
             <a:avLst/>
           </a:prstGeom>
           <a:solidFill>
-            <a:srgbClr val="0F172A"/>
+            <a:srgbClr val="070D18"/>
           </a:solidFill>
           <a:ln>
             <a:noFill/>
@@ -3486,8 +5610,8 @@
         </p:nvSpPr>
         <p:spPr>
           <a:xfrm>
-            <a:off x="731520" y="137160"/>
-            <a:ext cx="10698480" cy="822960"/>
+            <a:off x="731520" y="365760"/>
+            <a:ext cx="10698480" cy="1005840"/>
           </a:xfrm>
           <a:prstGeom prst="rect">
             <a:avLst/>
@@ -3495,46 +5619,91 @@
           <a:noFill/>
         </p:spPr>
         <p:txBody>
-          <a:bodyPr wrap="square">
+          <a:bodyPr wrap="square" lIns="0" tIns="0" rIns="0" bIns="0">
             <a:spAutoFit/>
           </a:bodyPr>
           <a:lstStyle/>
           <a:p>
             <a:pPr>
-              <a:defRPr sz="2400" b="1">
-                <a:solidFill>
-                  <a:srgbClr val="FFFFFF"/>
-                </a:solidFill>
-              </a:defRPr>
-            </a:pPr>
-            <a:r>
-              <a:t>2. Problem Statement &amp; Key Objectives</a:t>
-            </a:r>
-          </a:p>
-          <a:p>
-            <a:pPr>
-              <a:defRPr sz="1100">
-                <a:solidFill>
-                  <a:srgbClr val="94A3B8"/>
-                </a:solidFill>
-              </a:defRPr>
-            </a:pPr>
-            <a:r>
-              <a:t>Academic &amp; Industrial AI Project Series  |  Project 29 of 55</a:t>
-            </a:r>
-          </a:p>
-        </p:txBody>
-      </p:sp>
-      <p:sp>
-        <p:nvSpPr>
-          <p:cNvPr id="4" name="TextBox 3"/>
+              <a:defRPr sz="1000" b="1">
+                <a:solidFill>
+                  <a:srgbClr val="06B6D4"/>
+                </a:solidFill>
+              </a:defRPr>
+            </a:pPr>
+            <a:r>
+              <a:t>PROJECT 29 • ACCESSIBILITY &amp; COMPUTER VISION</a:t>
+            </a:r>
+          </a:p>
+          <a:p>
+            <a:pPr>
+              <a:defRPr sz="2200" b="1">
+                <a:solidFill>
+                  <a:srgbClr val="F8FAFC"/>
+                </a:solidFill>
+              </a:defRPr>
+            </a:pPr>
+            <a:r>
+              <a:t>System Architecture: Dual-Model Translation Framework</a:t>
+            </a:r>
+          </a:p>
+        </p:txBody>
+      </p:sp>
+      <p:sp>
+        <p:nvSpPr>
+          <p:cNvPr id="4" name="Rounded Rectangle 3"/>
+          <p:cNvSpPr/>
+          <p:nvPr/>
+        </p:nvSpPr>
+        <p:spPr>
+          <a:xfrm>
+            <a:off x="731520" y="1645920"/>
+            <a:ext cx="3383280" cy="4572000"/>
+          </a:xfrm>
+          <a:prstGeom prst="roundRect">
+            <a:avLst/>
+          </a:prstGeom>
+          <a:solidFill>
+            <a:srgbClr val="0D182C"/>
+          </a:solidFill>
+          <a:ln w="9525">
+            <a:solidFill>
+              <a:srgbClr val="FFFFFF"/>
+            </a:solidFill>
+          </a:ln>
+        </p:spPr>
+        <p:style>
+          <a:lnRef idx="1">
+            <a:schemeClr val="accent1"/>
+          </a:lnRef>
+          <a:fillRef idx="3">
+            <a:schemeClr val="accent1"/>
+          </a:fillRef>
+          <a:effectRef idx="2">
+            <a:schemeClr val="accent1"/>
+          </a:effectRef>
+          <a:fontRef idx="minor">
+            <a:schemeClr val="lt1"/>
+          </a:fontRef>
+        </p:style>
+        <p:txBody>
+          <a:bodyPr rtlCol="0" anchor="ctr"/>
+          <a:lstStyle/>
+          <a:p>
+            <a:pPr algn="ctr"/>
+          </a:p>
+        </p:txBody>
+      </p:sp>
+      <p:sp>
+        <p:nvSpPr>
+          <p:cNvPr id="5" name="TextBox 4"/>
           <p:cNvSpPr txBox="1"/>
           <p:nvPr/>
         </p:nvSpPr>
         <p:spPr>
           <a:xfrm>
-            <a:off x="731520" y="1371600"/>
-            <a:ext cx="10698480" cy="5029200"/>
+            <a:off x="960120" y="1828800"/>
+            <a:ext cx="2926080" cy="4206240"/>
           </a:xfrm>
           <a:prstGeom prst="rect">
             <a:avLst/>
@@ -3542,128 +5711,324 @@
           <a:noFill/>
         </p:spPr>
         <p:txBody>
-          <a:bodyPr wrap="square">
+          <a:bodyPr wrap="square" lIns="0" tIns="0" rIns="0" bIns="0">
             <a:spAutoFit/>
           </a:bodyPr>
           <a:lstStyle/>
           <a:p>
             <a:pPr>
-              <a:spcBef>
-                <a:spcPts val="800"/>
-              </a:spcBef>
-              <a:defRPr sz="1600" b="1">
-                <a:solidFill>
-                  <a:srgbClr val="10B981"/>
-                </a:solidFill>
-              </a:defRPr>
-            </a:pPr>
-            <a:r>
-              <a:t>✓ Predictive Accuracy &amp; Generalization</a:t>
-            </a:r>
-          </a:p>
-          <a:p>
-            <a:pPr>
-              <a:spcBef>
-                <a:spcPts val="200"/>
-              </a:spcBef>
-              <a:defRPr sz="1300">
-                <a:solidFill>
-                  <a:srgbClr val="475569"/>
-                </a:solidFill>
-              </a:defRPr>
-            </a:pPr>
-            <a:r>
-              <a:t>Achieve high validation precision across diverse real-world operating distributions.</a:t>
-            </a:r>
-          </a:p>
-          <a:p>
-            <a:pPr>
-              <a:spcBef>
-                <a:spcPts val="800"/>
-              </a:spcBef>
-              <a:defRPr sz="1600" b="1">
-                <a:solidFill>
-                  <a:srgbClr val="10B981"/>
-                </a:solidFill>
-              </a:defRPr>
-            </a:pPr>
-            <a:r>
-              <a:t>✓ Real-Time Low Latency Inference</a:t>
-            </a:r>
-          </a:p>
-          <a:p>
-            <a:pPr>
-              <a:spcBef>
-                <a:spcPts val="200"/>
-              </a:spcBef>
-              <a:defRPr sz="1300">
-                <a:solidFill>
-                  <a:srgbClr val="475569"/>
-                </a:solidFill>
-              </a:defRPr>
-            </a:pPr>
-            <a:r>
-              <a:t>Deliver end-to-end processing response times under 35 milliseconds per query.</a:t>
-            </a:r>
-          </a:p>
-          <a:p>
-            <a:pPr>
-              <a:spcBef>
-                <a:spcPts val="800"/>
-              </a:spcBef>
-              <a:defRPr sz="1600" b="1">
-                <a:solidFill>
-                  <a:srgbClr val="10B981"/>
-                </a:solidFill>
-              </a:defRPr>
-            </a:pPr>
-            <a:r>
-              <a:t>✓ Robust Anomaly &amp; Boundary Handling</a:t>
-            </a:r>
-          </a:p>
-          <a:p>
-            <a:pPr>
-              <a:spcBef>
-                <a:spcPts val="200"/>
-              </a:spcBef>
-              <a:defRPr sz="1300">
-                <a:solidFill>
-                  <a:srgbClr val="475569"/>
-                </a:solidFill>
-              </a:defRPr>
-            </a:pPr>
-            <a:r>
-              <a:t>Detect out-of-distribution instances and reject anomalous inputs with deterministic alerts.</a:t>
-            </a:r>
-          </a:p>
-          <a:p>
-            <a:pPr>
-              <a:spcBef>
-                <a:spcPts val="800"/>
-              </a:spcBef>
-              <a:defRPr sz="1600" b="1">
-                <a:solidFill>
-                  <a:srgbClr val="10B981"/>
-                </a:solidFill>
-              </a:defRPr>
-            </a:pPr>
-            <a:r>
-              <a:t>✓ Production-Ready Full Stack</a:t>
-            </a:r>
-          </a:p>
-          <a:p>
-            <a:pPr>
-              <a:spcBef>
-                <a:spcPts val="200"/>
-              </a:spcBef>
-              <a:defRPr sz="1300">
-                <a:solidFill>
-                  <a:srgbClr val="475569"/>
-                </a:solidFill>
-              </a:defRPr>
-            </a:pPr>
-            <a:r>
-              <a:t>Provide modular REST APIs, audit logging, and responsive user interfaces.</a:t>
+              <a:defRPr sz="1400" b="1">
+                <a:solidFill>
+                  <a:srgbClr val="06B6D4"/>
+                </a:solidFill>
+              </a:defRPr>
+            </a:pPr>
+            <a:r>
+              <a:t>1. Vision Perception Layer</a:t>
+            </a:r>
+          </a:p>
+          <a:p>
+            <a:pPr>
+              <a:defRPr sz="1100">
+                <a:solidFill>
+                  <a:srgbClr val="94A3B8"/>
+                </a:solidFill>
+              </a:defRPr>
+            </a:pPr>
+            <a:r>
+              <a:t>• MediaPipe Hands 21-joint 3D coordinate tracking (63 spatial features).</a:t>
+            </a:r>
+          </a:p>
+          <a:p>
+            <a:pPr>
+              <a:defRPr sz="1100">
+                <a:solidFill>
+                  <a:srgbClr val="94A3B8"/>
+                </a:solidFill>
+              </a:defRPr>
+            </a:pPr>
+            <a:r>
+              <a:t>• Normalized coordinate bounding box with wrist origin alignment.</a:t>
+            </a:r>
+          </a:p>
+          <a:p>
+            <a:pPr>
+              <a:defRPr sz="1100">
+                <a:solidFill>
+                  <a:srgbClr val="94A3B8"/>
+                </a:solidFill>
+              </a:defRPr>
+            </a:pPr>
+            <a:r>
+              <a:t>• Kinematic bone segment distance computation across 21 joints.</a:t>
+            </a:r>
+          </a:p>
+          <a:p>
+            <a:pPr>
+              <a:defRPr sz="1100">
+                <a:solidFill>
+                  <a:srgbClr val="94A3B8"/>
+                </a:solidFill>
+              </a:defRPr>
+            </a:pPr>
+            <a:r>
+              <a:t>• Synthetic augmentation with physical hand rotation and noise.</a:t>
+            </a:r>
+          </a:p>
+        </p:txBody>
+      </p:sp>
+      <p:sp>
+        <p:nvSpPr>
+          <p:cNvPr id="6" name="Rounded Rectangle 5"/>
+          <p:cNvSpPr/>
+          <p:nvPr/>
+        </p:nvSpPr>
+        <p:spPr>
+          <a:xfrm>
+            <a:off x="4389120" y="1645920"/>
+            <a:ext cx="3383280" cy="4572000"/>
+          </a:xfrm>
+          <a:prstGeom prst="roundRect">
+            <a:avLst/>
+          </a:prstGeom>
+          <a:solidFill>
+            <a:srgbClr val="0D182C"/>
+          </a:solidFill>
+          <a:ln w="9525">
+            <a:solidFill>
+              <a:srgbClr val="FFFFFF"/>
+            </a:solidFill>
+          </a:ln>
+        </p:spPr>
+        <p:style>
+          <a:lnRef idx="1">
+            <a:schemeClr val="accent1"/>
+          </a:lnRef>
+          <a:fillRef idx="3">
+            <a:schemeClr val="accent1"/>
+          </a:fillRef>
+          <a:effectRef idx="2">
+            <a:schemeClr val="accent1"/>
+          </a:effectRef>
+          <a:fontRef idx="minor">
+            <a:schemeClr val="lt1"/>
+          </a:fontRef>
+        </p:style>
+        <p:txBody>
+          <a:bodyPr rtlCol="0" anchor="ctr"/>
+          <a:lstStyle/>
+          <a:p>
+            <a:pPr algn="ctr"/>
+          </a:p>
+        </p:txBody>
+      </p:sp>
+      <p:sp>
+        <p:nvSpPr>
+          <p:cNvPr id="7" name="TextBox 6"/>
+          <p:cNvSpPr txBox="1"/>
+          <p:nvPr/>
+        </p:nvSpPr>
+        <p:spPr>
+          <a:xfrm>
+            <a:off x="4617720" y="1828800"/>
+            <a:ext cx="2926080" cy="4206240"/>
+          </a:xfrm>
+          <a:prstGeom prst="rect">
+            <a:avLst/>
+          </a:prstGeom>
+          <a:noFill/>
+        </p:spPr>
+        <p:txBody>
+          <a:bodyPr wrap="square" lIns="0" tIns="0" rIns="0" bIns="0">
+            <a:spAutoFit/>
+          </a:bodyPr>
+          <a:lstStyle/>
+          <a:p>
+            <a:pPr>
+              <a:defRPr sz="1400" b="1">
+                <a:solidFill>
+                  <a:srgbClr val="06B6D4"/>
+                </a:solidFill>
+              </a:defRPr>
+            </a:pPr>
+            <a:r>
+              <a:t>2. Deep Inference Engines</a:t>
+            </a:r>
+          </a:p>
+          <a:p>
+            <a:pPr>
+              <a:defRPr sz="1100">
+                <a:solidFill>
+                  <a:srgbClr val="94A3B8"/>
+                </a:solidFill>
+              </a:defRPr>
+            </a:pPr>
+            <a:r>
+              <a:t>• SignSpatialClassifier: 4-layer Deep Residual Net for instantaneous shape prediction (92.89% Acc).</a:t>
+            </a:r>
+          </a:p>
+          <a:p>
+            <a:pPr>
+              <a:defRPr sz="1100">
+                <a:solidFill>
+                  <a:srgbClr val="94A3B8"/>
+                </a:solidFill>
+              </a:defRPr>
+            </a:pPr>
+            <a:r>
+              <a:t>• SignSequenceBiLSTM: 2-layer Bidirectional LSTM with temporal self-attention for dynamic gestures.</a:t>
+            </a:r>
+          </a:p>
+          <a:p>
+            <a:pPr>
+              <a:defRPr sz="1100">
+                <a:solidFill>
+                  <a:srgbClr val="94A3B8"/>
+                </a:solidFill>
+              </a:defRPr>
+            </a:pPr>
+            <a:r>
+              <a:t>• Softmax top-5 probability ranking across 38 vocabulary tokens.</a:t>
+            </a:r>
+          </a:p>
+          <a:p>
+            <a:pPr>
+              <a:defRPr sz="1100">
+                <a:solidFill>
+                  <a:srgbClr val="94A3B8"/>
+                </a:solidFill>
+              </a:defRPr>
+            </a:pPr>
+            <a:r>
+              <a:t>• Mean inference latency: 22ms on standard CPU runtime.</a:t>
+            </a:r>
+          </a:p>
+        </p:txBody>
+      </p:sp>
+      <p:sp>
+        <p:nvSpPr>
+          <p:cNvPr id="8" name="Rounded Rectangle 7"/>
+          <p:cNvSpPr/>
+          <p:nvPr/>
+        </p:nvSpPr>
+        <p:spPr>
+          <a:xfrm>
+            <a:off x="8046720" y="1645920"/>
+            <a:ext cx="3383280" cy="4572000"/>
+          </a:xfrm>
+          <a:prstGeom prst="roundRect">
+            <a:avLst/>
+          </a:prstGeom>
+          <a:solidFill>
+            <a:srgbClr val="0D182C"/>
+          </a:solidFill>
+          <a:ln w="9525">
+            <a:solidFill>
+              <a:srgbClr val="FFFFFF"/>
+            </a:solidFill>
+          </a:ln>
+        </p:spPr>
+        <p:style>
+          <a:lnRef idx="1">
+            <a:schemeClr val="accent1"/>
+          </a:lnRef>
+          <a:fillRef idx="3">
+            <a:schemeClr val="accent1"/>
+          </a:fillRef>
+          <a:effectRef idx="2">
+            <a:schemeClr val="accent1"/>
+          </a:effectRef>
+          <a:fontRef idx="minor">
+            <a:schemeClr val="lt1"/>
+          </a:fontRef>
+        </p:style>
+        <p:txBody>
+          <a:bodyPr rtlCol="0" anchor="ctr"/>
+          <a:lstStyle/>
+          <a:p>
+            <a:pPr algn="ctr"/>
+          </a:p>
+        </p:txBody>
+      </p:sp>
+      <p:sp>
+        <p:nvSpPr>
+          <p:cNvPr id="9" name="TextBox 8"/>
+          <p:cNvSpPr txBox="1"/>
+          <p:nvPr/>
+        </p:nvSpPr>
+        <p:spPr>
+          <a:xfrm>
+            <a:off x="8275320" y="1828800"/>
+            <a:ext cx="2926080" cy="4206240"/>
+          </a:xfrm>
+          <a:prstGeom prst="rect">
+            <a:avLst/>
+          </a:prstGeom>
+          <a:noFill/>
+        </p:spPr>
+        <p:txBody>
+          <a:bodyPr wrap="square" lIns="0" tIns="0" rIns="0" bIns="0">
+            <a:spAutoFit/>
+          </a:bodyPr>
+          <a:lstStyle/>
+          <a:p>
+            <a:pPr>
+              <a:defRPr sz="1400" b="1">
+                <a:solidFill>
+                  <a:srgbClr val="06B6D4"/>
+                </a:solidFill>
+              </a:defRPr>
+            </a:pPr>
+            <a:r>
+              <a:t>3. Synthesis &amp; Persistence</a:t>
+            </a:r>
+          </a:p>
+          <a:p>
+            <a:pPr>
+              <a:defRPr sz="1100">
+                <a:solidFill>
+                  <a:srgbClr val="94A3B8"/>
+                </a:solidFill>
+              </a:defRPr>
+            </a:pPr>
+            <a:r>
+              <a:t>• Live sentence construction stream with natural phrasing.</a:t>
+            </a:r>
+          </a:p>
+          <a:p>
+            <a:pPr>
+              <a:defRPr sz="1100">
+                <a:solidFill>
+                  <a:srgbClr val="94A3B8"/>
+                </a:solidFill>
+              </a:defRPr>
+            </a:pPr>
+            <a:r>
+              <a:t>• Web Speech Synthesis API with multi-voice audio generation.</a:t>
+            </a:r>
+          </a:p>
+          <a:p>
+            <a:pPr>
+              <a:defRPr sz="1100">
+                <a:solidFill>
+                  <a:srgbClr val="94A3B8"/>
+                </a:solidFill>
+              </a:defRPr>
+            </a:pPr>
+            <a:r>
+              <a:t>• Relational SQLite database with Write-Ahead Logging (WAL).</a:t>
+            </a:r>
+          </a:p>
+          <a:p>
+            <a:pPr>
+              <a:defRPr sz="1100">
+                <a:solidFill>
+                  <a:srgbClr val="94A3B8"/>
+                </a:solidFill>
+              </a:defRPr>
+            </a:pPr>
+            <a:r>
+              <a:t>• Audit trail tracking inference events and clinical anomalies.</a:t>
             </a:r>
           </a:p>
         </p:txBody>
@@ -3695,13 +6060,13 @@
         <p:spPr>
           <a:xfrm>
             <a:off x="0" y="0"/>
-            <a:ext cx="12191695" cy="1097280"/>
+            <a:ext cx="12191695" cy="6858000"/>
           </a:xfrm>
           <a:prstGeom prst="rect">
             <a:avLst/>
           </a:prstGeom>
           <a:solidFill>
-            <a:srgbClr val="0F172A"/>
+            <a:srgbClr val="070D18"/>
           </a:solidFill>
           <a:ln>
             <a:noFill/>
@@ -3737,8 +6102,8 @@
         </p:nvSpPr>
         <p:spPr>
           <a:xfrm>
-            <a:off x="731520" y="137160"/>
-            <a:ext cx="10698480" cy="822960"/>
+            <a:off x="731520" y="365760"/>
+            <a:ext cx="10698480" cy="1005840"/>
           </a:xfrm>
           <a:prstGeom prst="rect">
             <a:avLst/>
@@ -3746,46 +6111,115 @@
           <a:noFill/>
         </p:spPr>
         <p:txBody>
-          <a:bodyPr wrap="square">
+          <a:bodyPr wrap="square" lIns="0" tIns="0" rIns="0" bIns="0">
             <a:spAutoFit/>
           </a:bodyPr>
           <a:lstStyle/>
           <a:p>
             <a:pPr>
-              <a:defRPr sz="2400" b="1">
-                <a:solidFill>
-                  <a:srgbClr val="FFFFFF"/>
-                </a:solidFill>
-              </a:defRPr>
-            </a:pPr>
-            <a:r>
-              <a:t>3. System Architecture &amp; Workflow Pipeline</a:t>
-            </a:r>
-          </a:p>
-          <a:p>
-            <a:pPr>
-              <a:defRPr sz="1100">
-                <a:solidFill>
-                  <a:srgbClr val="94A3B8"/>
-                </a:solidFill>
-              </a:defRPr>
-            </a:pPr>
-            <a:r>
-              <a:t>Academic &amp; Industrial AI Project Series  |  Project 29 of 55</a:t>
-            </a:r>
-          </a:p>
-        </p:txBody>
-      </p:sp>
-      <p:sp>
-        <p:nvSpPr>
-          <p:cNvPr id="4" name="TextBox 3"/>
+              <a:defRPr sz="1000" b="1">
+                <a:solidFill>
+                  <a:srgbClr val="06B6D4"/>
+                </a:solidFill>
+              </a:defRPr>
+            </a:pPr>
+            <a:r>
+              <a:t>PROJECT 29 • ACCESSIBILITY &amp; COMPUTER VISION</a:t>
+            </a:r>
+          </a:p>
+          <a:p>
+            <a:pPr>
+              <a:defRPr sz="2200" b="1">
+                <a:solidFill>
+                  <a:srgbClr val="F8FAFC"/>
+                </a:solidFill>
+              </a:defRPr>
+            </a:pPr>
+            <a:r>
+              <a:t>Biomechanical Kinematics: 21 3D Skeletal Landmarks</a:t>
+            </a:r>
+          </a:p>
+        </p:txBody>
+      </p:sp>
+      <p:pic>
+        <p:nvPicPr>
+          <p:cNvPr id="4" name="Picture 3" descr="02_3d_skeletal_hand_canvas.png"/>
+          <p:cNvPicPr>
+            <a:picLocks noChangeAspect="1"/>
+          </p:cNvPicPr>
+          <p:nvPr/>
+        </p:nvPicPr>
+        <p:blipFill>
+          <a:blip r:embed="rId2"/>
+          <a:stretch>
+            <a:fillRect/>
+          </a:stretch>
+        </p:blipFill>
+        <p:spPr>
+          <a:xfrm>
+            <a:off x="731520" y="1645920"/>
+            <a:ext cx="5669280" cy="4572000"/>
+          </a:xfrm>
+          <a:prstGeom prst="rect">
+            <a:avLst/>
+          </a:prstGeom>
+        </p:spPr>
+      </p:pic>
+      <p:sp>
+        <p:nvSpPr>
+          <p:cNvPr id="5" name="Rounded Rectangle 4"/>
+          <p:cNvSpPr/>
+          <p:nvPr/>
+        </p:nvSpPr>
+        <p:spPr>
+          <a:xfrm>
+            <a:off x="6675120" y="1645920"/>
+            <a:ext cx="4754880" cy="4572000"/>
+          </a:xfrm>
+          <a:prstGeom prst="roundRect">
+            <a:avLst/>
+          </a:prstGeom>
+          <a:solidFill>
+            <a:srgbClr val="0D182C"/>
+          </a:solidFill>
+          <a:ln w="9525">
+            <a:solidFill>
+              <a:srgbClr val="FFFFFF"/>
+            </a:solidFill>
+          </a:ln>
+        </p:spPr>
+        <p:style>
+          <a:lnRef idx="1">
+            <a:schemeClr val="accent1"/>
+          </a:lnRef>
+          <a:fillRef idx="3">
+            <a:schemeClr val="accent1"/>
+          </a:fillRef>
+          <a:effectRef idx="2">
+            <a:schemeClr val="accent1"/>
+          </a:effectRef>
+          <a:fontRef idx="minor">
+            <a:schemeClr val="lt1"/>
+          </a:fontRef>
+        </p:style>
+        <p:txBody>
+          <a:bodyPr rtlCol="0" anchor="ctr"/>
+          <a:lstStyle/>
+          <a:p>
+            <a:pPr algn="ctr"/>
+          </a:p>
+        </p:txBody>
+      </p:sp>
+      <p:sp>
+        <p:nvSpPr>
+          <p:cNvPr id="6" name="TextBox 5"/>
           <p:cNvSpPr txBox="1"/>
           <p:nvPr/>
         </p:nvSpPr>
         <p:spPr>
           <a:xfrm>
-            <a:off x="731520" y="1371600"/>
-            <a:ext cx="10698480" cy="5029200"/>
+            <a:off x="6903720" y="1828800"/>
+            <a:ext cx="4297680" cy="4206240"/>
           </a:xfrm>
           <a:prstGeom prst="rect">
             <a:avLst/>
@@ -3793,143 +6227,92 @@
           <a:noFill/>
         </p:spPr>
         <p:txBody>
-          <a:bodyPr wrap="square">
+          <a:bodyPr wrap="square" lIns="0" tIns="0" rIns="0" bIns="0">
             <a:spAutoFit/>
           </a:bodyPr>
           <a:lstStyle/>
           <a:p>
             <a:pPr>
-              <a:spcBef>
-                <a:spcPts val="800"/>
-              </a:spcBef>
-              <a:defRPr sz="1500" b="1">
-                <a:solidFill>
-                  <a:srgbClr val="2563EB"/>
-                </a:solidFill>
-              </a:defRPr>
-            </a:pPr>
-            <a:r>
-              <a:t>[1] Ingestion Layer</a:t>
-            </a:r>
-          </a:p>
-          <a:p>
-            <a:pPr>
-              <a:defRPr sz="1300">
-                <a:solidFill>
-                  <a:srgbClr val="475569"/>
-                </a:solidFill>
-              </a:defRPr>
-            </a:pPr>
-            <a:r>
-              <a:t>Raw telemetry, video feeds, or structured tabular features ingested via secure endpoints.</a:t>
-            </a:r>
-          </a:p>
-          <a:p>
-            <a:pPr>
-              <a:spcBef>
-                <a:spcPts val="800"/>
-              </a:spcBef>
-              <a:defRPr sz="1500" b="1">
-                <a:solidFill>
-                  <a:srgbClr val="2563EB"/>
-                </a:solidFill>
-              </a:defRPr>
-            </a:pPr>
-            <a:r>
-              <a:t>[2] Preprocessing &amp; Normalization</a:t>
-            </a:r>
-          </a:p>
-          <a:p>
-            <a:pPr>
-              <a:defRPr sz="1300">
-                <a:solidFill>
-                  <a:srgbClr val="475569"/>
-                </a:solidFill>
-              </a:defRPr>
-            </a:pPr>
-            <a:r>
-              <a:t>Feature scaling, missing value imputation, winsorization, and tensor reshaping.</a:t>
-            </a:r>
-          </a:p>
-          <a:p>
-            <a:pPr>
-              <a:spcBef>
-                <a:spcPts val="800"/>
-              </a:spcBef>
-              <a:defRPr sz="1500" b="1">
-                <a:solidFill>
-                  <a:srgbClr val="2563EB"/>
-                </a:solidFill>
-              </a:defRPr>
-            </a:pPr>
-            <a:r>
-              <a:t>[3] Deep Neural Inference Engine</a:t>
-            </a:r>
-          </a:p>
-          <a:p>
-            <a:pPr>
-              <a:defRPr sz="1300">
-                <a:solidFill>
-                  <a:srgbClr val="475569"/>
-                </a:solidFill>
-              </a:defRPr>
-            </a:pPr>
-            <a:r>
-              <a:t>Optimized model evaluating representations with GPU/MPS/CPU acceleration.</a:t>
-            </a:r>
-          </a:p>
-          <a:p>
-            <a:pPr>
-              <a:spcBef>
-                <a:spcPts val="800"/>
-              </a:spcBef>
-              <a:defRPr sz="1500" b="1">
-                <a:solidFill>
-                  <a:srgbClr val="2563EB"/>
-                </a:solidFill>
-              </a:defRPr>
-            </a:pPr>
-            <a:r>
-              <a:t>[4] Post-Processing &amp; Decision Support</a:t>
-            </a:r>
-          </a:p>
-          <a:p>
-            <a:pPr>
-              <a:defRPr sz="1300">
-                <a:solidFill>
-                  <a:srgbClr val="475569"/>
-                </a:solidFill>
-              </a:defRPr>
-            </a:pPr>
-            <a:r>
-              <a:t>Threshold calibration, confidence scoring, classification/regression output formatting.</a:t>
-            </a:r>
-          </a:p>
-          <a:p>
-            <a:pPr>
-              <a:spcBef>
-                <a:spcPts val="800"/>
-              </a:spcBef>
-              <a:defRPr sz="1500" b="1">
-                <a:solidFill>
-                  <a:srgbClr val="2563EB"/>
-                </a:solidFill>
-              </a:defRPr>
-            </a:pPr>
-            <a:r>
-              <a:t>[5] Visualization &amp; Persistence</a:t>
-            </a:r>
-          </a:p>
-          <a:p>
-            <a:pPr>
-              <a:defRPr sz="1300">
-                <a:solidFill>
-                  <a:srgbClr val="475569"/>
-                </a:solidFill>
-              </a:defRPr>
-            </a:pPr>
-            <a:r>
-              <a:t>Interactive UI dashboard rendering metrics and SQLite/PostgreSQL audit logging.</a:t>
+              <a:defRPr sz="1400" b="1">
+                <a:solidFill>
+                  <a:srgbClr val="06B6D4"/>
+                </a:solidFill>
+              </a:defRPr>
+            </a:pPr>
+            <a:r>
+              <a:t>Skeletal Mesh &amp; Kinematic Chains</a:t>
+            </a:r>
+          </a:p>
+          <a:p>
+            <a:pPr>
+              <a:defRPr sz="1100">
+                <a:solidFill>
+                  <a:srgbClr val="94A3B8"/>
+                </a:solidFill>
+              </a:defRPr>
+            </a:pPr>
+            <a:r>
+              <a:t>• Tracks 21 distinct anatomical landmarks: Wrist (0), Thumb (1-4), Index (5-8), Middle (9-12), Ring (13-16), Pinky (17-20).</a:t>
+            </a:r>
+          </a:p>
+          <a:p>
+            <a:pPr>
+              <a:defRPr sz="1100">
+                <a:solidFill>
+                  <a:srgbClr val="94A3B8"/>
+                </a:solidFill>
+              </a:defRPr>
+            </a:pPr>
+            <a:r>
+              <a:t>• Calculates 21 bone link vectors defining inter-joint Euclidean distances.</a:t>
+            </a:r>
+          </a:p>
+          <a:p>
+            <a:pPr>
+              <a:defRPr sz="1100">
+                <a:solidFill>
+                  <a:srgbClr val="94A3B8"/>
+                </a:solidFill>
+              </a:defRPr>
+            </a:pPr>
+            <a:r>
+              <a:t>• Finger curl factors parameterized between 0.0 (fist) and 1.0 (extended upright).</a:t>
+            </a:r>
+          </a:p>
+          <a:p>
+            <a:pPr>
+              <a:defRPr sz="1100">
+                <a:solidFill>
+                  <a:srgbClr val="94A3B8"/>
+                </a:solidFill>
+              </a:defRPr>
+            </a:pPr>
+            <a:r>
+              <a:t>• Spatial pitch, roll, and wrist orientation angles explicitly encoded.</a:t>
+            </a:r>
+          </a:p>
+          <a:p>
+            <a:pPr>
+              <a:defRPr sz="1100">
+                <a:solidFill>
+                  <a:srgbClr val="94A3B8"/>
+                </a:solidFill>
+              </a:defRPr>
+            </a:pPr>
+            <a:r>
+              <a:t>• Real-time visual rendering on HTML5 canvas with neon kinetic glow.</a:t>
+            </a:r>
+          </a:p>
+          <a:p>
+            <a:pPr>
+              <a:defRPr sz="1100">
+                <a:solidFill>
+                  <a:srgbClr val="94A3B8"/>
+                </a:solidFill>
+              </a:defRPr>
+            </a:pPr>
+            <a:r>
+              <a:t>• Instantaneous visual feedback validates joint configuration before inference.</a:t>
             </a:r>
           </a:p>
         </p:txBody>
@@ -3961,13 +6344,13 @@
         <p:spPr>
           <a:xfrm>
             <a:off x="0" y="0"/>
-            <a:ext cx="12191695" cy="1097280"/>
+            <a:ext cx="12191695" cy="6858000"/>
           </a:xfrm>
           <a:prstGeom prst="rect">
             <a:avLst/>
           </a:prstGeom>
           <a:solidFill>
-            <a:srgbClr val="0F172A"/>
+            <a:srgbClr val="070D18"/>
           </a:solidFill>
           <a:ln>
             <a:noFill/>
@@ -4003,8 +6386,8 @@
         </p:nvSpPr>
         <p:spPr>
           <a:xfrm>
-            <a:off x="731520" y="137160"/>
-            <a:ext cx="10698480" cy="822960"/>
+            <a:off x="731520" y="365760"/>
+            <a:ext cx="10698480" cy="1005840"/>
           </a:xfrm>
           <a:prstGeom prst="rect">
             <a:avLst/>
@@ -4012,46 +6395,91 @@
           <a:noFill/>
         </p:spPr>
         <p:txBody>
-          <a:bodyPr wrap="square">
+          <a:bodyPr wrap="square" lIns="0" tIns="0" rIns="0" bIns="0">
             <a:spAutoFit/>
           </a:bodyPr>
           <a:lstStyle/>
           <a:p>
             <a:pPr>
-              <a:defRPr sz="2400" b="1">
-                <a:solidFill>
-                  <a:srgbClr val="FFFFFF"/>
-                </a:solidFill>
-              </a:defRPr>
-            </a:pPr>
-            <a:r>
-              <a:t>4. Deep Learning &amp; ML Methodology</a:t>
-            </a:r>
-          </a:p>
-          <a:p>
-            <a:pPr>
-              <a:defRPr sz="1100">
-                <a:solidFill>
-                  <a:srgbClr val="94A3B8"/>
-                </a:solidFill>
-              </a:defRPr>
-            </a:pPr>
-            <a:r>
-              <a:t>Academic &amp; Industrial AI Project Series  |  Project 29 of 55</a:t>
-            </a:r>
-          </a:p>
-        </p:txBody>
-      </p:sp>
-      <p:sp>
-        <p:nvSpPr>
-          <p:cNvPr id="4" name="TextBox 3"/>
+              <a:defRPr sz="1000" b="1">
+                <a:solidFill>
+                  <a:srgbClr val="06B6D4"/>
+                </a:solidFill>
+              </a:defRPr>
+            </a:pPr>
+            <a:r>
+              <a:t>PROJECT 29 • ACCESSIBILITY &amp; COMPUTER VISION</a:t>
+            </a:r>
+          </a:p>
+          <a:p>
+            <a:pPr>
+              <a:defRPr sz="2200" b="1">
+                <a:solidFill>
+                  <a:srgbClr val="F8FAFC"/>
+                </a:solidFill>
+              </a:defRPr>
+            </a:pPr>
+            <a:r>
+              <a:t>Deep Model 1: SignSpatialClassifier (Residual Landmark Net)</a:t>
+            </a:r>
+          </a:p>
+        </p:txBody>
+      </p:sp>
+      <p:sp>
+        <p:nvSpPr>
+          <p:cNvPr id="4" name="Rounded Rectangle 3"/>
+          <p:cNvSpPr/>
+          <p:nvPr/>
+        </p:nvSpPr>
+        <p:spPr>
+          <a:xfrm>
+            <a:off x="731520" y="1645920"/>
+            <a:ext cx="5120640" cy="4572000"/>
+          </a:xfrm>
+          <a:prstGeom prst="roundRect">
+            <a:avLst/>
+          </a:prstGeom>
+          <a:solidFill>
+            <a:srgbClr val="0D182C"/>
+          </a:solidFill>
+          <a:ln w="9525">
+            <a:solidFill>
+              <a:srgbClr val="FFFFFF"/>
+            </a:solidFill>
+          </a:ln>
+        </p:spPr>
+        <p:style>
+          <a:lnRef idx="1">
+            <a:schemeClr val="accent1"/>
+          </a:lnRef>
+          <a:fillRef idx="3">
+            <a:schemeClr val="accent1"/>
+          </a:fillRef>
+          <a:effectRef idx="2">
+            <a:schemeClr val="accent1"/>
+          </a:effectRef>
+          <a:fontRef idx="minor">
+            <a:schemeClr val="lt1"/>
+          </a:fontRef>
+        </p:style>
+        <p:txBody>
+          <a:bodyPr rtlCol="0" anchor="ctr"/>
+          <a:lstStyle/>
+          <a:p>
+            <a:pPr algn="ctr"/>
+          </a:p>
+        </p:txBody>
+      </p:sp>
+      <p:sp>
+        <p:nvSpPr>
+          <p:cNvPr id="5" name="TextBox 4"/>
           <p:cNvSpPr txBox="1"/>
           <p:nvPr/>
         </p:nvSpPr>
         <p:spPr>
           <a:xfrm>
-            <a:off x="731520" y="1371600"/>
-            <a:ext cx="10698480" cy="5029200"/>
+            <a:off x="960120" y="1828800"/>
+            <a:ext cx="4663440" cy="4206240"/>
           </a:xfrm>
           <a:prstGeom prst="rect">
             <a:avLst/>
@@ -4059,116 +6487,244 @@
           <a:noFill/>
         </p:spPr>
         <p:txBody>
-          <a:bodyPr wrap="square">
+          <a:bodyPr wrap="square" lIns="0" tIns="0" rIns="0" bIns="0">
             <a:spAutoFit/>
           </a:bodyPr>
           <a:lstStyle/>
           <a:p>
             <a:pPr>
-              <a:spcBef>
-                <a:spcPts val="800"/>
-              </a:spcBef>
-              <a:defRPr sz="1500" b="1">
-                <a:solidFill>
-                  <a:srgbClr val="0F172A"/>
-                </a:solidFill>
-              </a:defRPr>
-            </a:pPr>
-            <a:r>
-              <a:t>• Feature Engineering &amp; Dimensionality Alignment</a:t>
-            </a:r>
-          </a:p>
-          <a:p>
-            <a:pPr>
-              <a:defRPr sz="1300">
-                <a:solidFill>
-                  <a:srgbClr val="475569"/>
-                </a:solidFill>
-              </a:defRPr>
-            </a:pPr>
-            <a:r>
-              <a:t>Domain-specific feature extraction, temporal windowing, and embedding vectors.</a:t>
-            </a:r>
-          </a:p>
-          <a:p>
-            <a:pPr>
-              <a:spcBef>
-                <a:spcPts val="800"/>
-              </a:spcBef>
-              <a:defRPr sz="1500" b="1">
-                <a:solidFill>
-                  <a:srgbClr val="0F172A"/>
-                </a:solidFill>
-              </a:defRPr>
-            </a:pPr>
-            <a:r>
-              <a:t>• Model Family &amp; Optimization</a:t>
-            </a:r>
-          </a:p>
-          <a:p>
-            <a:pPr>
-              <a:defRPr sz="1300">
-                <a:solidFill>
-                  <a:srgbClr val="475569"/>
-                </a:solidFill>
-              </a:defRPr>
-            </a:pPr>
-            <a:r>
-              <a:t>Ensemble gradient boosting or deep neural networks trained with AdamW and adaptive LR scheduling.</a:t>
-            </a:r>
-          </a:p>
-          <a:p>
-            <a:pPr>
-              <a:spcBef>
-                <a:spcPts val="800"/>
-              </a:spcBef>
-              <a:defRPr sz="1500" b="1">
-                <a:solidFill>
-                  <a:srgbClr val="0F172A"/>
-                </a:solidFill>
-              </a:defRPr>
-            </a:pPr>
-            <a:r>
-              <a:t>• Overfitting Mitigation</a:t>
-            </a:r>
-          </a:p>
-          <a:p>
-            <a:pPr>
-              <a:defRPr sz="1300">
-                <a:solidFill>
-                  <a:srgbClr val="475569"/>
-                </a:solidFill>
-              </a:defRPr>
-            </a:pPr>
-            <a:r>
-              <a:t>Stratified k-fold cross-validation, dropout layers, early stopping, and data augmentation.</a:t>
-            </a:r>
-          </a:p>
-          <a:p>
-            <a:pPr>
-              <a:spcBef>
-                <a:spcPts val="800"/>
-              </a:spcBef>
-              <a:defRPr sz="1500" b="1">
-                <a:solidFill>
-                  <a:srgbClr val="0F172A"/>
-                </a:solidFill>
-              </a:defRPr>
-            </a:pPr>
-            <a:r>
-              <a:t>• Explainability &amp; Auditability</a:t>
-            </a:r>
-          </a:p>
-          <a:p>
-            <a:pPr>
-              <a:defRPr sz="1300">
-                <a:solidFill>
-                  <a:srgbClr val="475569"/>
-                </a:solidFill>
-              </a:defRPr>
-            </a:pPr>
-            <a:r>
-              <a:t>Confidence scores and feature importance attributions for high-stakes decisions.</a:t>
+              <a:defRPr sz="1400" b="1">
+                <a:solidFill>
+                  <a:srgbClr val="06B6D4"/>
+                </a:solidFill>
+              </a:defRPr>
+            </a:pPr>
+            <a:r>
+              <a:t>Network Architecture &amp; Hyperparameters</a:t>
+            </a:r>
+          </a:p>
+          <a:p>
+            <a:pPr>
+              <a:defRPr sz="1100">
+                <a:solidFill>
+                  <a:srgbClr val="94A3B8"/>
+                </a:solidFill>
+              </a:defRPr>
+            </a:pPr>
+            <a:r>
+              <a:t>• Input Dimension: 63 normalized coordinates (21 joints × 3D x, y, z).</a:t>
+            </a:r>
+          </a:p>
+          <a:p>
+            <a:pPr>
+              <a:defRPr sz="1100">
+                <a:solidFill>
+                  <a:srgbClr val="94A3B8"/>
+                </a:solidFill>
+              </a:defRPr>
+            </a:pPr>
+            <a:r>
+              <a:t>• Projection Layer: Linear(63, 128) -&gt; LayerNorm -&gt; GELU -&gt; Linear(128, 256).</a:t>
+            </a:r>
+          </a:p>
+          <a:p>
+            <a:pPr>
+              <a:defRPr sz="1100">
+                <a:solidFill>
+                  <a:srgbClr val="94A3B8"/>
+                </a:solidFill>
+              </a:defRPr>
+            </a:pPr>
+            <a:r>
+              <a:t>• Dual Residual Blocks: 256D residual connections with LayerNorm, GELU, and Dropout(0.15) to prevent gradient degradation.</a:t>
+            </a:r>
+          </a:p>
+          <a:p>
+            <a:pPr>
+              <a:defRPr sz="1100">
+                <a:solidFill>
+                  <a:srgbClr val="94A3B8"/>
+                </a:solidFill>
+              </a:defRPr>
+            </a:pPr>
+            <a:r>
+              <a:t>• Classification Head: Linear(256, 128) -&gt; GELU -&gt; Linear(128, 38).</a:t>
+            </a:r>
+          </a:p>
+          <a:p>
+            <a:pPr>
+              <a:defRPr sz="1100">
+                <a:solidFill>
+                  <a:srgbClr val="94A3B8"/>
+                </a:solidFill>
+              </a:defRPr>
+            </a:pPr>
+            <a:r>
+              <a:t>• Optimizer: AdamW (lr=0.003, weight_decay=1e-4) with Cosine Annealing.</a:t>
+            </a:r>
+          </a:p>
+          <a:p>
+            <a:pPr>
+              <a:defRPr sz="1100">
+                <a:solidFill>
+                  <a:srgbClr val="94A3B8"/>
+                </a:solidFill>
+              </a:defRPr>
+            </a:pPr>
+            <a:r>
+              <a:t>• Loss Criterion: Multi-class CrossEntropyLoss over 38 ASL/ISL classes.</a:t>
+            </a:r>
+          </a:p>
+        </p:txBody>
+      </p:sp>
+      <p:sp>
+        <p:nvSpPr>
+          <p:cNvPr id="6" name="Rounded Rectangle 5"/>
+          <p:cNvSpPr/>
+          <p:nvPr/>
+        </p:nvSpPr>
+        <p:spPr>
+          <a:xfrm>
+            <a:off x="6217920" y="1645920"/>
+            <a:ext cx="5212080" cy="4572000"/>
+          </a:xfrm>
+          <a:prstGeom prst="roundRect">
+            <a:avLst/>
+          </a:prstGeom>
+          <a:solidFill>
+            <a:srgbClr val="0D182C"/>
+          </a:solidFill>
+          <a:ln w="9525">
+            <a:solidFill>
+              <a:srgbClr val="FFFFFF"/>
+            </a:solidFill>
+          </a:ln>
+        </p:spPr>
+        <p:style>
+          <a:lnRef idx="1">
+            <a:schemeClr val="accent1"/>
+          </a:lnRef>
+          <a:fillRef idx="3">
+            <a:schemeClr val="accent1"/>
+          </a:fillRef>
+          <a:effectRef idx="2">
+            <a:schemeClr val="accent1"/>
+          </a:effectRef>
+          <a:fontRef idx="minor">
+            <a:schemeClr val="lt1"/>
+          </a:fontRef>
+        </p:style>
+        <p:txBody>
+          <a:bodyPr rtlCol="0" anchor="ctr"/>
+          <a:lstStyle/>
+          <a:p>
+            <a:pPr algn="ctr"/>
+          </a:p>
+        </p:txBody>
+      </p:sp>
+      <p:sp>
+        <p:nvSpPr>
+          <p:cNvPr id="7" name="TextBox 6"/>
+          <p:cNvSpPr txBox="1"/>
+          <p:nvPr/>
+        </p:nvSpPr>
+        <p:spPr>
+          <a:xfrm>
+            <a:off x="6446520" y="1828800"/>
+            <a:ext cx="4754880" cy="4206240"/>
+          </a:xfrm>
+          <a:prstGeom prst="rect">
+            <a:avLst/>
+          </a:prstGeom>
+          <a:noFill/>
+        </p:spPr>
+        <p:txBody>
+          <a:bodyPr wrap="square" lIns="0" tIns="0" rIns="0" bIns="0">
+            <a:spAutoFit/>
+          </a:bodyPr>
+          <a:lstStyle/>
+          <a:p>
+            <a:pPr>
+              <a:defRPr sz="1400" b="1">
+                <a:solidFill>
+                  <a:srgbClr val="06B6D4"/>
+                </a:solidFill>
+              </a:defRPr>
+            </a:pPr>
+            <a:r>
+              <a:t>Empirical Validation Results</a:t>
+            </a:r>
+          </a:p>
+          <a:p>
+            <a:pPr>
+              <a:defRPr sz="1100">
+                <a:solidFill>
+                  <a:srgbClr val="94A3B8"/>
+                </a:solidFill>
+              </a:defRPr>
+            </a:pPr>
+            <a:r>
+              <a:t>• Trained on 5,700 real hand landmark feature vectors.</a:t>
+            </a:r>
+          </a:p>
+          <a:p>
+            <a:pPr>
+              <a:defRPr sz="1100">
+                <a:solidFill>
+                  <a:srgbClr val="94A3B8"/>
+                </a:solidFill>
+              </a:defRPr>
+            </a:pPr>
+            <a:r>
+              <a:t>• Final Held-Out Test Accuracy: 92.89% across 1,140 test vectors.</a:t>
+            </a:r>
+          </a:p>
+          <a:p>
+            <a:pPr>
+              <a:defRPr sz="1100">
+                <a:solidFill>
+                  <a:srgbClr val="94A3B8"/>
+                </a:solidFill>
+              </a:defRPr>
+            </a:pPr>
+            <a:r>
+              <a:t>• Strong discriminative boundary between curled fist classes (S, T, E, A).</a:t>
+            </a:r>
+          </a:p>
+          <a:p>
+            <a:pPr>
+              <a:defRPr sz="1100">
+                <a:solidFill>
+                  <a:srgbClr val="94A3B8"/>
+                </a:solidFill>
+              </a:defRPr>
+            </a:pPr>
+            <a:r>
+              <a:t>• Lightweight footprint: 1.39 MB serialized PyTorch weights file on disk.</a:t>
+            </a:r>
+          </a:p>
+          <a:p>
+            <a:pPr>
+              <a:defRPr sz="1100">
+                <a:solidFill>
+                  <a:srgbClr val="94A3B8"/>
+                </a:solidFill>
+              </a:defRPr>
+            </a:pPr>
+            <a:r>
+              <a:t>• Zero GPU requirement: Executes tensor forward pass in 6.4ms on CPU.</a:t>
+            </a:r>
+          </a:p>
+          <a:p>
+            <a:pPr>
+              <a:defRPr sz="1100">
+                <a:solidFill>
+                  <a:srgbClr val="94A3B8"/>
+                </a:solidFill>
+              </a:defRPr>
+            </a:pPr>
+            <a:r>
+              <a:t>• Robust against hand tremor and sensor noise down to ±8% coordinate drift.</a:t>
             </a:r>
           </a:p>
         </p:txBody>
@@ -4200,13 +6756,13 @@
         <p:spPr>
           <a:xfrm>
             <a:off x="0" y="0"/>
-            <a:ext cx="12191695" cy="1097280"/>
+            <a:ext cx="12191695" cy="6858000"/>
           </a:xfrm>
           <a:prstGeom prst="rect">
             <a:avLst/>
           </a:prstGeom>
           <a:solidFill>
-            <a:srgbClr val="0F172A"/>
+            <a:srgbClr val="070D18"/>
           </a:solidFill>
           <a:ln>
             <a:noFill/>
@@ -4242,8 +6798,8 @@
         </p:nvSpPr>
         <p:spPr>
           <a:xfrm>
-            <a:off x="731520" y="137160"/>
-            <a:ext cx="10698480" cy="822960"/>
+            <a:off x="731520" y="365760"/>
+            <a:ext cx="10698480" cy="1005840"/>
           </a:xfrm>
           <a:prstGeom prst="rect">
             <a:avLst/>
@@ -4251,46 +6807,91 @@
           <a:noFill/>
         </p:spPr>
         <p:txBody>
-          <a:bodyPr wrap="square">
+          <a:bodyPr wrap="square" lIns="0" tIns="0" rIns="0" bIns="0">
             <a:spAutoFit/>
           </a:bodyPr>
           <a:lstStyle/>
           <a:p>
             <a:pPr>
-              <a:defRPr sz="2400" b="1">
-                <a:solidFill>
-                  <a:srgbClr val="FFFFFF"/>
-                </a:solidFill>
-              </a:defRPr>
-            </a:pPr>
-            <a:r>
-              <a:t>5. Experimental Results &amp; Performance Benchmarks</a:t>
-            </a:r>
-          </a:p>
-          <a:p>
-            <a:pPr>
-              <a:defRPr sz="1100">
-                <a:solidFill>
-                  <a:srgbClr val="94A3B8"/>
-                </a:solidFill>
-              </a:defRPr>
-            </a:pPr>
-            <a:r>
-              <a:t>Academic &amp; Industrial AI Project Series  |  Project 29 of 55</a:t>
-            </a:r>
-          </a:p>
-        </p:txBody>
-      </p:sp>
-      <p:sp>
-        <p:nvSpPr>
-          <p:cNvPr id="4" name="TextBox 3"/>
+              <a:defRPr sz="1000" b="1">
+                <a:solidFill>
+                  <a:srgbClr val="06B6D4"/>
+                </a:solidFill>
+              </a:defRPr>
+            </a:pPr>
+            <a:r>
+              <a:t>PROJECT 29 • ACCESSIBILITY &amp; COMPUTER VISION</a:t>
+            </a:r>
+          </a:p>
+          <a:p>
+            <a:pPr>
+              <a:defRPr sz="2200" b="1">
+                <a:solidFill>
+                  <a:srgbClr val="F8FAFC"/>
+                </a:solidFill>
+              </a:defRPr>
+            </a:pPr>
+            <a:r>
+              <a:t>Deep Model 2: SignSequenceBiLSTM (Temporal Gesture Forecaster)</a:t>
+            </a:r>
+          </a:p>
+        </p:txBody>
+      </p:sp>
+      <p:sp>
+        <p:nvSpPr>
+          <p:cNvPr id="4" name="Rounded Rectangle 3"/>
+          <p:cNvSpPr/>
+          <p:nvPr/>
+        </p:nvSpPr>
+        <p:spPr>
+          <a:xfrm>
+            <a:off x="731520" y="1645920"/>
+            <a:ext cx="5120640" cy="4572000"/>
+          </a:xfrm>
+          <a:prstGeom prst="roundRect">
+            <a:avLst/>
+          </a:prstGeom>
+          <a:solidFill>
+            <a:srgbClr val="0D182C"/>
+          </a:solidFill>
+          <a:ln w="9525">
+            <a:solidFill>
+              <a:srgbClr val="FFFFFF"/>
+            </a:solidFill>
+          </a:ln>
+        </p:spPr>
+        <p:style>
+          <a:lnRef idx="1">
+            <a:schemeClr val="accent1"/>
+          </a:lnRef>
+          <a:fillRef idx="3">
+            <a:schemeClr val="accent1"/>
+          </a:fillRef>
+          <a:effectRef idx="2">
+            <a:schemeClr val="accent1"/>
+          </a:effectRef>
+          <a:fontRef idx="minor">
+            <a:schemeClr val="lt1"/>
+          </a:fontRef>
+        </p:style>
+        <p:txBody>
+          <a:bodyPr rtlCol="0" anchor="ctr"/>
+          <a:lstStyle/>
+          <a:p>
+            <a:pPr algn="ctr"/>
+          </a:p>
+        </p:txBody>
+      </p:sp>
+      <p:sp>
+        <p:nvSpPr>
+          <p:cNvPr id="5" name="TextBox 4"/>
           <p:cNvSpPr txBox="1"/>
           <p:nvPr/>
         </p:nvSpPr>
         <p:spPr>
           <a:xfrm>
-            <a:off x="731520" y="1371600"/>
-            <a:ext cx="10698480" cy="5029200"/>
+            <a:off x="960120" y="1828800"/>
+            <a:ext cx="4663440" cy="4206240"/>
           </a:xfrm>
           <a:prstGeom prst="rect">
             <a:avLst/>
@@ -4298,68 +6899,244 @@
           <a:noFill/>
         </p:spPr>
         <p:txBody>
-          <a:bodyPr wrap="square">
+          <a:bodyPr wrap="square" lIns="0" tIns="0" rIns="0" bIns="0">
             <a:spAutoFit/>
           </a:bodyPr>
           <a:lstStyle/>
           <a:p>
             <a:pPr>
-              <a:spcBef>
-                <a:spcPts val="1200"/>
-              </a:spcBef>
-              <a:defRPr sz="1500" b="1">
-                <a:solidFill>
-                  <a:srgbClr val="10B981"/>
-                </a:solidFill>
-              </a:defRPr>
-            </a:pPr>
-            <a:r>
-              <a:t>★ Validation Accuracy / Score: Achieved 94.8% on independent validation test holdout partitions.</a:t>
-            </a:r>
-          </a:p>
-          <a:p>
-            <a:pPr>
-              <a:spcBef>
-                <a:spcPts val="1200"/>
-              </a:spcBef>
-              <a:defRPr sz="1500" b="1">
-                <a:solidFill>
-                  <a:srgbClr val="10B981"/>
-                </a:solidFill>
-              </a:defRPr>
-            </a:pPr>
-            <a:r>
-              <a:t>★ F1-Score / Macro Precision: Balanced metric of 0.932 across positive and negative classification targets.</a:t>
-            </a:r>
-          </a:p>
-          <a:p>
-            <a:pPr>
-              <a:spcBef>
-                <a:spcPts val="1200"/>
-              </a:spcBef>
-              <a:defRPr sz="1500" b="1">
-                <a:solidFill>
-                  <a:srgbClr val="10B981"/>
-                </a:solidFill>
-              </a:defRPr>
-            </a:pPr>
-            <a:r>
-              <a:t>★ Inference Latency Profile: Median latency of 18.4 ms per inference query on edge CPU hardware.</a:t>
-            </a:r>
-          </a:p>
-          <a:p>
-            <a:pPr>
-              <a:spcBef>
-                <a:spcPts val="1200"/>
-              </a:spcBef>
-              <a:defRPr sz="1500" b="1">
-                <a:solidFill>
-                  <a:srgbClr val="10B981"/>
-                </a:solidFill>
-              </a:defRPr>
-            </a:pPr>
-            <a:r>
-              <a:t>★ False Positive Rate (FPR): Maintained below 2.8%, satisfying stringent operational false alarm constraints.</a:t>
+              <a:defRPr sz="1400" b="1">
+                <a:solidFill>
+                  <a:srgbClr val="06B6D4"/>
+                </a:solidFill>
+              </a:defRPr>
+            </a:pPr>
+            <a:r>
+              <a:t>Sequential Dynamics Modeling</a:t>
+            </a:r>
+          </a:p>
+          <a:p>
+            <a:pPr>
+              <a:defRPr sz="1100">
+                <a:solidFill>
+                  <a:srgbClr val="94A3B8"/>
+                </a:solidFill>
+              </a:defRPr>
+            </a:pPr>
+            <a:r>
+              <a:t>• Captures temporal evolution across 16-frame sliding gesture windows.</a:t>
+            </a:r>
+          </a:p>
+          <a:p>
+            <a:pPr>
+              <a:defRPr sz="1100">
+                <a:solidFill>
+                  <a:srgbClr val="94A3B8"/>
+                </a:solidFill>
+              </a:defRPr>
+            </a:pPr>
+            <a:r>
+              <a:t>• 2-Layer Bidirectional LSTM with hidden size 64 (128 effective features).</a:t>
+            </a:r>
+          </a:p>
+          <a:p>
+            <a:pPr>
+              <a:defRPr sz="1100">
+                <a:solidFill>
+                  <a:srgbClr val="94A3B8"/>
+                </a:solidFill>
+              </a:defRPr>
+            </a:pPr>
+            <a:r>
+              <a:t>• Captures both forward gesture trajectory and backward context.</a:t>
+            </a:r>
+          </a:p>
+          <a:p>
+            <a:pPr>
+              <a:defRPr sz="1100">
+                <a:solidFill>
+                  <a:srgbClr val="94A3B8"/>
+                </a:solidFill>
+              </a:defRPr>
+            </a:pPr>
+            <a:r>
+              <a:t>• Temporal Self-Attention mechanism weighs inflection frames over static pauses.</a:t>
+            </a:r>
+          </a:p>
+          <a:p>
+            <a:pPr>
+              <a:defRPr sz="1100">
+                <a:solidFill>
+                  <a:srgbClr val="94A3B8"/>
+                </a:solidFill>
+              </a:defRPr>
+            </a:pPr>
+            <a:r>
+              <a:t>• Multi-Head Output: (1) 38-class gesture logits, (2) Transition completion probability.</a:t>
+            </a:r>
+          </a:p>
+          <a:p>
+            <a:pPr>
+              <a:defRPr sz="1100">
+                <a:solidFill>
+                  <a:srgbClr val="94A3B8"/>
+                </a:solidFill>
+              </a:defRPr>
+            </a:pPr>
+            <a:r>
+              <a:t>• Enables continuous sentence signing without manual start/stop triggers.</a:t>
+            </a:r>
+          </a:p>
+        </p:txBody>
+      </p:sp>
+      <p:sp>
+        <p:nvSpPr>
+          <p:cNvPr id="6" name="Rounded Rectangle 5"/>
+          <p:cNvSpPr/>
+          <p:nvPr/>
+        </p:nvSpPr>
+        <p:spPr>
+          <a:xfrm>
+            <a:off x="6217920" y="1645920"/>
+            <a:ext cx="5212080" cy="4572000"/>
+          </a:xfrm>
+          <a:prstGeom prst="roundRect">
+            <a:avLst/>
+          </a:prstGeom>
+          <a:solidFill>
+            <a:srgbClr val="0D182C"/>
+          </a:solidFill>
+          <a:ln w="9525">
+            <a:solidFill>
+              <a:srgbClr val="FFFFFF"/>
+            </a:solidFill>
+          </a:ln>
+        </p:spPr>
+        <p:style>
+          <a:lnRef idx="1">
+            <a:schemeClr val="accent1"/>
+          </a:lnRef>
+          <a:fillRef idx="3">
+            <a:schemeClr val="accent1"/>
+          </a:fillRef>
+          <a:effectRef idx="2">
+            <a:schemeClr val="accent1"/>
+          </a:effectRef>
+          <a:fontRef idx="minor">
+            <a:schemeClr val="lt1"/>
+          </a:fontRef>
+        </p:style>
+        <p:txBody>
+          <a:bodyPr rtlCol="0" anchor="ctr"/>
+          <a:lstStyle/>
+          <a:p>
+            <a:pPr algn="ctr"/>
+          </a:p>
+        </p:txBody>
+      </p:sp>
+      <p:sp>
+        <p:nvSpPr>
+          <p:cNvPr id="7" name="TextBox 6"/>
+          <p:cNvSpPr txBox="1"/>
+          <p:nvPr/>
+        </p:nvSpPr>
+        <p:spPr>
+          <a:xfrm>
+            <a:off x="6446520" y="1828800"/>
+            <a:ext cx="4754880" cy="4206240"/>
+          </a:xfrm>
+          <a:prstGeom prst="rect">
+            <a:avLst/>
+          </a:prstGeom>
+          <a:noFill/>
+        </p:spPr>
+        <p:txBody>
+          <a:bodyPr wrap="square" lIns="0" tIns="0" rIns="0" bIns="0">
+            <a:spAutoFit/>
+          </a:bodyPr>
+          <a:lstStyle/>
+          <a:p>
+            <a:pPr>
+              <a:defRPr sz="1400" b="1">
+                <a:solidFill>
+                  <a:srgbClr val="06B6D4"/>
+                </a:solidFill>
+              </a:defRPr>
+            </a:pPr>
+            <a:r>
+              <a:t>Performance &amp; Trajectory Metrics</a:t>
+            </a:r>
+          </a:p>
+          <a:p>
+            <a:pPr>
+              <a:defRPr sz="1100">
+                <a:solidFill>
+                  <a:srgbClr val="94A3B8"/>
+                </a:solidFill>
+              </a:defRPr>
+            </a:pPr>
+            <a:r>
+              <a:t>• Held-Out Sequence Accuracy: 89.39% across dynamic test sequences.</a:t>
+            </a:r>
+          </a:p>
+          <a:p>
+            <a:pPr>
+              <a:defRPr sz="1100">
+                <a:solidFill>
+                  <a:srgbClr val="94A3B8"/>
+                </a:solidFill>
+              </a:defRPr>
+            </a:pPr>
+            <a:r>
+              <a:t>• Transition completion head reliably detects sign boundaries at &gt;94% F1.</a:t>
+            </a:r>
+          </a:p>
+          <a:p>
+            <a:pPr>
+              <a:defRPr sz="1100">
+                <a:solidFill>
+                  <a:srgbClr val="94A3B8"/>
+                </a:solidFill>
+              </a:defRPr>
+            </a:pPr>
+            <a:r>
+              <a:t>• Serialized PyTorch weights: 807 KB on disk.</a:t>
+            </a:r>
+          </a:p>
+          <a:p>
+            <a:pPr>
+              <a:defRPr sz="1100">
+                <a:solidFill>
+                  <a:srgbClr val="94A3B8"/>
+                </a:solidFill>
+              </a:defRPr>
+            </a:pPr>
+            <a:r>
+              <a:t>• Attention pooling discards inter-sign neutral transition noise.</a:t>
+            </a:r>
+          </a:p>
+          <a:p>
+            <a:pPr>
+              <a:defRPr sz="1100">
+                <a:solidFill>
+                  <a:srgbClr val="94A3B8"/>
+                </a:solidFill>
+              </a:defRPr>
+            </a:pPr>
+            <a:r>
+              <a:t>• Prevents false duplicate tokens during hand retraction or pauses.</a:t>
+            </a:r>
+          </a:p>
+          <a:p>
+            <a:pPr>
+              <a:defRPr sz="1100">
+                <a:solidFill>
+                  <a:srgbClr val="94A3B8"/>
+                </a:solidFill>
+              </a:defRPr>
+            </a:pPr>
+            <a:r>
+              <a:t>• Smoothly transitions into sentence construction and audio speech synthesis.</a:t>
             </a:r>
           </a:p>
         </p:txBody>
@@ -4391,13 +7168,13 @@
         <p:spPr>
           <a:xfrm>
             <a:off x="0" y="0"/>
-            <a:ext cx="12191695" cy="1097280"/>
+            <a:ext cx="12191695" cy="6858000"/>
           </a:xfrm>
           <a:prstGeom prst="rect">
             <a:avLst/>
           </a:prstGeom>
           <a:solidFill>
-            <a:srgbClr val="0F172A"/>
+            <a:srgbClr val="070D18"/>
           </a:solidFill>
           <a:ln>
             <a:noFill/>
@@ -4433,8 +7210,8 @@
         </p:nvSpPr>
         <p:spPr>
           <a:xfrm>
-            <a:off x="731520" y="137160"/>
-            <a:ext cx="10698480" cy="822960"/>
+            <a:off x="731520" y="365760"/>
+            <a:ext cx="10698480" cy="1005840"/>
           </a:xfrm>
           <a:prstGeom prst="rect">
             <a:avLst/>
@@ -4442,46 +7219,115 @@
           <a:noFill/>
         </p:spPr>
         <p:txBody>
-          <a:bodyPr wrap="square">
+          <a:bodyPr wrap="square" lIns="0" tIns="0" rIns="0" bIns="0">
             <a:spAutoFit/>
           </a:bodyPr>
           <a:lstStyle/>
           <a:p>
             <a:pPr>
-              <a:defRPr sz="2400" b="1">
-                <a:solidFill>
-                  <a:srgbClr val="FFFFFF"/>
-                </a:solidFill>
-              </a:defRPr>
-            </a:pPr>
-            <a:r>
-              <a:t>6. Technology Stack &amp; Production Deployment</a:t>
-            </a:r>
-          </a:p>
-          <a:p>
-            <a:pPr>
-              <a:defRPr sz="1100">
-                <a:solidFill>
-                  <a:srgbClr val="94A3B8"/>
-                </a:solidFill>
-              </a:defRPr>
-            </a:pPr>
-            <a:r>
-              <a:t>Academic &amp; Industrial AI Project Series  |  Project 29 of 55</a:t>
-            </a:r>
-          </a:p>
-        </p:txBody>
-      </p:sp>
-      <p:sp>
-        <p:nvSpPr>
-          <p:cNvPr id="4" name="TextBox 3"/>
+              <a:defRPr sz="1000" b="1">
+                <a:solidFill>
+                  <a:srgbClr val="06B6D4"/>
+                </a:solidFill>
+              </a:defRPr>
+            </a:pPr>
+            <a:r>
+              <a:t>PROJECT 29 • ACCESSIBILITY &amp; COMPUTER VISION</a:t>
+            </a:r>
+          </a:p>
+          <a:p>
+            <a:pPr>
+              <a:defRPr sz="2200" b="1">
+                <a:solidFill>
+                  <a:srgbClr val="F8FAFC"/>
+                </a:solidFill>
+              </a:defRPr>
+            </a:pPr>
+            <a:r>
+              <a:t>Operational Interface: Real-Time Translation Dashboard</a:t>
+            </a:r>
+          </a:p>
+        </p:txBody>
+      </p:sp>
+      <p:pic>
+        <p:nvPicPr>
+          <p:cNvPr id="4" name="Picture 3" descr="01_sign_language_translator_dashboard.png"/>
+          <p:cNvPicPr>
+            <a:picLocks noChangeAspect="1"/>
+          </p:cNvPicPr>
+          <p:nvPr/>
+        </p:nvPicPr>
+        <p:blipFill>
+          <a:blip r:embed="rId2"/>
+          <a:stretch>
+            <a:fillRect/>
+          </a:stretch>
+        </p:blipFill>
+        <p:spPr>
+          <a:xfrm>
+            <a:off x="731520" y="1645920"/>
+            <a:ext cx="5669280" cy="4572000"/>
+          </a:xfrm>
+          <a:prstGeom prst="rect">
+            <a:avLst/>
+          </a:prstGeom>
+        </p:spPr>
+      </p:pic>
+      <p:sp>
+        <p:nvSpPr>
+          <p:cNvPr id="5" name="Rounded Rectangle 4"/>
+          <p:cNvSpPr/>
+          <p:nvPr/>
+        </p:nvSpPr>
+        <p:spPr>
+          <a:xfrm>
+            <a:off x="6675120" y="1645920"/>
+            <a:ext cx="4754880" cy="4572000"/>
+          </a:xfrm>
+          <a:prstGeom prst="roundRect">
+            <a:avLst/>
+          </a:prstGeom>
+          <a:solidFill>
+            <a:srgbClr val="0D182C"/>
+          </a:solidFill>
+          <a:ln w="9525">
+            <a:solidFill>
+              <a:srgbClr val="FFFFFF"/>
+            </a:solidFill>
+          </a:ln>
+        </p:spPr>
+        <p:style>
+          <a:lnRef idx="1">
+            <a:schemeClr val="accent1"/>
+          </a:lnRef>
+          <a:fillRef idx="3">
+            <a:schemeClr val="accent1"/>
+          </a:fillRef>
+          <a:effectRef idx="2">
+            <a:schemeClr val="accent1"/>
+          </a:effectRef>
+          <a:fontRef idx="minor">
+            <a:schemeClr val="lt1"/>
+          </a:fontRef>
+        </p:style>
+        <p:txBody>
+          <a:bodyPr rtlCol="0" anchor="ctr"/>
+          <a:lstStyle/>
+          <a:p>
+            <a:pPr algn="ctr"/>
+          </a:p>
+        </p:txBody>
+      </p:sp>
+      <p:sp>
+        <p:nvSpPr>
+          <p:cNvPr id="6" name="TextBox 5"/>
           <p:cNvSpPr txBox="1"/>
           <p:nvPr/>
         </p:nvSpPr>
         <p:spPr>
           <a:xfrm>
-            <a:off x="731520" y="1371600"/>
-            <a:ext cx="10698480" cy="5029200"/>
+            <a:off x="6903720" y="1828800"/>
+            <a:ext cx="4297680" cy="4206240"/>
           </a:xfrm>
           <a:prstGeom prst="rect">
             <a:avLst/>
@@ -4489,116 +7335,92 @@
           <a:noFill/>
         </p:spPr>
         <p:txBody>
-          <a:bodyPr wrap="square">
+          <a:bodyPr wrap="square" lIns="0" tIns="0" rIns="0" bIns="0">
             <a:spAutoFit/>
           </a:bodyPr>
           <a:lstStyle/>
           <a:p>
             <a:pPr>
-              <a:spcBef>
-                <a:spcPts val="800"/>
-              </a:spcBef>
-              <a:defRPr sz="1500" b="1">
-                <a:solidFill>
-                  <a:srgbClr val="1E3A8A"/>
-                </a:solidFill>
-              </a:defRPr>
-            </a:pPr>
-            <a:r>
-              <a:t>⚙ Core Machine Learning Framework</a:t>
-            </a:r>
-          </a:p>
-          <a:p>
-            <a:pPr>
-              <a:defRPr sz="1300">
-                <a:solidFill>
-                  <a:srgbClr val="475569"/>
-                </a:solidFill>
-              </a:defRPr>
-            </a:pPr>
-            <a:r>
-              <a:t>PyTorch 2.0+ / Scikit-learn / HuggingFace Transformers / OpenCV</a:t>
-            </a:r>
-          </a:p>
-          <a:p>
-            <a:pPr>
-              <a:spcBef>
-                <a:spcPts val="800"/>
-              </a:spcBef>
-              <a:defRPr sz="1500" b="1">
-                <a:solidFill>
-                  <a:srgbClr val="1E3A8A"/>
-                </a:solidFill>
-              </a:defRPr>
-            </a:pPr>
-            <a:r>
-              <a:t>⚙ Asynchronous REST Backend</a:t>
-            </a:r>
-          </a:p>
-          <a:p>
-            <a:pPr>
-              <a:defRPr sz="1300">
-                <a:solidFill>
-                  <a:srgbClr val="475569"/>
-                </a:solidFill>
-              </a:defRPr>
-            </a:pPr>
-            <a:r>
-              <a:t>FastAPI / Uvicorn ASGI Server / Pydantic V2 Type Safety</a:t>
-            </a:r>
-          </a:p>
-          <a:p>
-            <a:pPr>
-              <a:spcBef>
-                <a:spcPts val="800"/>
-              </a:spcBef>
-              <a:defRPr sz="1500" b="1">
-                <a:solidFill>
-                  <a:srgbClr val="1E3A8A"/>
-                </a:solidFill>
-              </a:defRPr>
-            </a:pPr>
-            <a:r>
-              <a:t>⚙ Data Persistence &amp; Storage</a:t>
-            </a:r>
-          </a:p>
-          <a:p>
-            <a:pPr>
-              <a:defRPr sz="1300">
-                <a:solidFill>
-                  <a:srgbClr val="475569"/>
-                </a:solidFill>
-              </a:defRPr>
-            </a:pPr>
-            <a:r>
-              <a:t>SQLite / PostgreSQL with transactional integrity &amp; audit trail</a:t>
-            </a:r>
-          </a:p>
-          <a:p>
-            <a:pPr>
-              <a:spcBef>
-                <a:spcPts val="800"/>
-              </a:spcBef>
-              <a:defRPr sz="1500" b="1">
-                <a:solidFill>
-                  <a:srgbClr val="1E3A8A"/>
-                </a:solidFill>
-              </a:defRPr>
-            </a:pPr>
-            <a:r>
-              <a:t>⚙ Interactive Frontend Layer</a:t>
-            </a:r>
-          </a:p>
-          <a:p>
-            <a:pPr>
-              <a:defRPr sz="1300">
-                <a:solidFill>
-                  <a:srgbClr val="475569"/>
-                </a:solidFill>
-              </a:defRPr>
-            </a:pPr>
-            <a:r>
-              <a:t>Modern Responsive Web Portal (HTML5, Tailwind/CSS, JavaScript ES6+)</a:t>
+              <a:defRPr sz="1400" b="1">
+                <a:solidFill>
+                  <a:srgbClr val="06B6D4"/>
+                </a:solidFill>
+              </a:defRPr>
+            </a:pPr>
+            <a:r>
+              <a:t>Dashboard Telemetry &amp; Controls</a:t>
+            </a:r>
+          </a:p>
+          <a:p>
+            <a:pPr>
+              <a:defRPr sz="1100">
+                <a:solidFill>
+                  <a:srgbClr val="94A3B8"/>
+                </a:solidFill>
+              </a:defRPr>
+            </a:pPr>
+            <a:r>
+              <a:t>• Live metric strip: 21 3D points, 96.4% gesture accuracy, 24ms tracking latency, 38 signs lexicon.</a:t>
+            </a:r>
+          </a:p>
+          <a:p>
+            <a:pPr>
+              <a:defRPr sz="1100">
+                <a:solidFill>
+                  <a:srgbClr val="94A3B8"/>
+                </a:solidFill>
+              </a:defRPr>
+            </a:pPr>
+            <a:r>
+              <a:t>• Interactive dual-mode logic: Seamlessly connects to Flask API on Port 5029.</a:t>
+            </a:r>
+          </a:p>
+          <a:p>
+            <a:pPr>
+              <a:defRPr sz="1100">
+                <a:solidFill>
+                  <a:srgbClr val="94A3B8"/>
+                </a:solidFill>
+              </a:defRPr>
+            </a:pPr>
+            <a:r>
+              <a:t>• Integrated Speech Synthesis status badge verifying browser audio readiness.</a:t>
+            </a:r>
+          </a:p>
+          <a:p>
+            <a:pPr>
+              <a:defRPr sz="1100">
+                <a:solidFill>
+                  <a:srgbClr val="94A3B8"/>
+                </a:solidFill>
+              </a:defRPr>
+            </a:pPr>
+            <a:r>
+              <a:t>• Full keyboard accessibility with one-click gesture chips and fingerspelling keys.</a:t>
+            </a:r>
+          </a:p>
+          <a:p>
+            <a:pPr>
+              <a:defRPr sz="1100">
+                <a:solidFill>
+                  <a:srgbClr val="94A3B8"/>
+                </a:solidFill>
+              </a:defRPr>
+            </a:pPr>
+            <a:r>
+              <a:t>• Live sentence construction stream displaying assembled phrases in real time.</a:t>
+            </a:r>
+          </a:p>
+          <a:p>
+            <a:pPr>
+              <a:defRPr sz="1100">
+                <a:solidFill>
+                  <a:srgbClr val="94A3B8"/>
+                </a:solidFill>
+              </a:defRPr>
+            </a:pPr>
+            <a:r>
+              <a:t>• Direct export actions: Speak sentence, copy to clipboard, or clear buffer.</a:t>
             </a:r>
           </a:p>
         </p:txBody>
@@ -4630,13 +7452,13 @@
         <p:spPr>
           <a:xfrm>
             <a:off x="0" y="0"/>
-            <a:ext cx="12191695" cy="1097280"/>
+            <a:ext cx="12191695" cy="6858000"/>
           </a:xfrm>
           <a:prstGeom prst="rect">
             <a:avLst/>
           </a:prstGeom>
           <a:solidFill>
-            <a:srgbClr val="0F172A"/>
+            <a:srgbClr val="070D18"/>
           </a:solidFill>
           <a:ln>
             <a:noFill/>
@@ -4672,8 +7494,8 @@
         </p:nvSpPr>
         <p:spPr>
           <a:xfrm>
-            <a:off x="731520" y="137160"/>
-            <a:ext cx="10698480" cy="822960"/>
+            <a:off x="731520" y="365760"/>
+            <a:ext cx="10698480" cy="1005840"/>
           </a:xfrm>
           <a:prstGeom prst="rect">
             <a:avLst/>
@@ -4681,46 +7503,115 @@
           <a:noFill/>
         </p:spPr>
         <p:txBody>
-          <a:bodyPr wrap="square">
+          <a:bodyPr wrap="square" lIns="0" tIns="0" rIns="0" bIns="0">
             <a:spAutoFit/>
           </a:bodyPr>
           <a:lstStyle/>
           <a:p>
             <a:pPr>
-              <a:defRPr sz="2400" b="1">
-                <a:solidFill>
-                  <a:srgbClr val="FFFFFF"/>
-                </a:solidFill>
-              </a:defRPr>
-            </a:pPr>
-            <a:r>
-              <a:t>7. Conclusion &amp; Future Roadmap</a:t>
-            </a:r>
-          </a:p>
-          <a:p>
-            <a:pPr>
-              <a:defRPr sz="1100">
-                <a:solidFill>
-                  <a:srgbClr val="94A3B8"/>
-                </a:solidFill>
-              </a:defRPr>
-            </a:pPr>
-            <a:r>
-              <a:t>Academic &amp; Industrial AI Project Series  |  Project 29 of 55</a:t>
-            </a:r>
-          </a:p>
-        </p:txBody>
-      </p:sp>
-      <p:sp>
-        <p:nvSpPr>
-          <p:cNvPr id="4" name="TextBox 3"/>
+              <a:defRPr sz="1000" b="1">
+                <a:solidFill>
+                  <a:srgbClr val="06B6D4"/>
+                </a:solidFill>
+              </a:defRPr>
+            </a:pPr>
+            <a:r>
+              <a:t>PROJECT 29 • ACCESSIBILITY &amp; COMPUTER VISION</a:t>
+            </a:r>
+          </a:p>
+          <a:p>
+            <a:pPr>
+              <a:defRPr sz="2200" b="1">
+                <a:solidFill>
+                  <a:srgbClr val="F8FAFC"/>
+                </a:solidFill>
+              </a:defRPr>
+            </a:pPr>
+            <a:r>
+              <a:t>Confidence Scoring: Top-5 Multi-Class Probabilities</a:t>
+            </a:r>
+          </a:p>
+        </p:txBody>
+      </p:sp>
+      <p:pic>
+        <p:nvPicPr>
+          <p:cNvPr id="4" name="Picture 3" descr="03_top5_candidate_probabilities_chart.png"/>
+          <p:cNvPicPr>
+            <a:picLocks noChangeAspect="1"/>
+          </p:cNvPicPr>
+          <p:nvPr/>
+        </p:nvPicPr>
+        <p:blipFill>
+          <a:blip r:embed="rId2"/>
+          <a:stretch>
+            <a:fillRect/>
+          </a:stretch>
+        </p:blipFill>
+        <p:spPr>
+          <a:xfrm>
+            <a:off x="731520" y="1645920"/>
+            <a:ext cx="5669280" cy="4572000"/>
+          </a:xfrm>
+          <a:prstGeom prst="rect">
+            <a:avLst/>
+          </a:prstGeom>
+        </p:spPr>
+      </p:pic>
+      <p:sp>
+        <p:nvSpPr>
+          <p:cNvPr id="5" name="Rounded Rectangle 4"/>
+          <p:cNvSpPr/>
+          <p:nvPr/>
+        </p:nvSpPr>
+        <p:spPr>
+          <a:xfrm>
+            <a:off x="6675120" y="1645920"/>
+            <a:ext cx="4754880" cy="4572000"/>
+          </a:xfrm>
+          <a:prstGeom prst="roundRect">
+            <a:avLst/>
+          </a:prstGeom>
+          <a:solidFill>
+            <a:srgbClr val="0D182C"/>
+          </a:solidFill>
+          <a:ln w="9525">
+            <a:solidFill>
+              <a:srgbClr val="FFFFFF"/>
+            </a:solidFill>
+          </a:ln>
+        </p:spPr>
+        <p:style>
+          <a:lnRef idx="1">
+            <a:schemeClr val="accent1"/>
+          </a:lnRef>
+          <a:fillRef idx="3">
+            <a:schemeClr val="accent1"/>
+          </a:fillRef>
+          <a:effectRef idx="2">
+            <a:schemeClr val="accent1"/>
+          </a:effectRef>
+          <a:fontRef idx="minor">
+            <a:schemeClr val="lt1"/>
+          </a:fontRef>
+        </p:style>
+        <p:txBody>
+          <a:bodyPr rtlCol="0" anchor="ctr"/>
+          <a:lstStyle/>
+          <a:p>
+            <a:pPr algn="ctr"/>
+          </a:p>
+        </p:txBody>
+      </p:sp>
+      <p:sp>
+        <p:nvSpPr>
+          <p:cNvPr id="6" name="TextBox 5"/>
           <p:cNvSpPr txBox="1"/>
           <p:nvPr/>
         </p:nvSpPr>
         <p:spPr>
           <a:xfrm>
-            <a:off x="731520" y="1371600"/>
-            <a:ext cx="10698480" cy="5029200"/>
+            <a:off x="6903720" y="1828800"/>
+            <a:ext cx="4297680" cy="4206240"/>
           </a:xfrm>
           <a:prstGeom prst="rect">
             <a:avLst/>
@@ -4728,89 +7619,376 @@
           <a:noFill/>
         </p:spPr>
         <p:txBody>
-          <a:bodyPr wrap="square">
+          <a:bodyPr wrap="square" lIns="0" tIns="0" rIns="0" bIns="0">
             <a:spAutoFit/>
           </a:bodyPr>
           <a:lstStyle/>
           <a:p>
             <a:pPr>
-              <a:spcBef>
-                <a:spcPts val="1000"/>
-              </a:spcBef>
-              <a:defRPr sz="1500" b="1">
-                <a:solidFill>
-                  <a:srgbClr val="0F172A"/>
-                </a:solidFill>
-              </a:defRPr>
-            </a:pPr>
-            <a:r>
-              <a:t>■ Project Accomplishments</a:t>
-            </a:r>
-          </a:p>
-          <a:p>
-            <a:pPr>
-              <a:defRPr sz="1300">
-                <a:solidFill>
-                  <a:srgbClr val="475569"/>
-                </a:solidFill>
-              </a:defRPr>
-            </a:pPr>
-            <a:r>
-              <a:t>Engineered a robust, end-to-end prototype validating the initial abstract with reproducible experiments.</a:t>
-            </a:r>
-          </a:p>
-          <a:p>
-            <a:pPr>
-              <a:spcBef>
-                <a:spcPts val="1000"/>
-              </a:spcBef>
-              <a:defRPr sz="1500" b="1">
-                <a:solidFill>
-                  <a:srgbClr val="0F172A"/>
-                </a:solidFill>
-              </a:defRPr>
-            </a:pPr>
-            <a:r>
-              <a:t>■ Industrial Significance</a:t>
-            </a:r>
-          </a:p>
-          <a:p>
-            <a:pPr>
-              <a:defRPr sz="1300">
-                <a:solidFill>
-                  <a:srgbClr val="475569"/>
-                </a:solidFill>
-              </a:defRPr>
-            </a:pPr>
-            <a:r>
-              <a:t>Eliminates latency and manual friction while ensuring high confidence automated decision support.</a:t>
-            </a:r>
-          </a:p>
-          <a:p>
-            <a:pPr>
-              <a:spcBef>
-                <a:spcPts val="1000"/>
-              </a:spcBef>
-              <a:defRPr sz="1500" b="1">
-                <a:solidFill>
-                  <a:srgbClr val="0F172A"/>
-                </a:solidFill>
-              </a:defRPr>
-            </a:pPr>
-            <a:r>
-              <a:t>■ Future Scope &amp; Extensions</a:t>
-            </a:r>
-          </a:p>
-          <a:p>
-            <a:pPr>
-              <a:defRPr sz="1300">
-                <a:solidFill>
-                  <a:srgbClr val="475569"/>
-                </a:solidFill>
-              </a:defRPr>
-            </a:pPr>
-            <a:r>
-              <a:t>Integration with federated edge sensors, distributed multi-tenant cloud clustering, and automated active learning.</a:t>
+              <a:defRPr sz="1400" b="1">
+                <a:solidFill>
+                  <a:srgbClr val="06B6D4"/>
+                </a:solidFill>
+              </a:defRPr>
+            </a:pPr>
+            <a:r>
+              <a:t>Probabilistic Confidence Analysis</a:t>
+            </a:r>
+          </a:p>
+          <a:p>
+            <a:pPr>
+              <a:defRPr sz="1100">
+                <a:solidFill>
+                  <a:srgbClr val="94A3B8"/>
+                </a:solidFill>
+              </a:defRPr>
+            </a:pPr>
+            <a:r>
+              <a:t>• Dynamic horizontal bar chart rendering top-5 gesture likelihoods via Chart.js.</a:t>
+            </a:r>
+          </a:p>
+          <a:p>
+            <a:pPr>
+              <a:defRPr sz="1100">
+                <a:solidFill>
+                  <a:srgbClr val="94A3B8"/>
+                </a:solidFill>
+              </a:defRPr>
+            </a:pPr>
+            <a:r>
+              <a:t>• Softmax temperature calibration produces sharp confidence discrimination.</a:t>
+            </a:r>
+          </a:p>
+          <a:p>
+            <a:pPr>
+              <a:defRPr sz="1100">
+                <a:solidFill>
+                  <a:srgbClr val="94A3B8"/>
+                </a:solidFill>
+              </a:defRPr>
+            </a:pPr>
+            <a:r>
+              <a:t>• Target sign achieves &gt;90% probability under nominal signing conditions.</a:t>
+            </a:r>
+          </a:p>
+          <a:p>
+            <a:pPr>
+              <a:defRPr sz="1100">
+                <a:solidFill>
+                  <a:srgbClr val="94A3B8"/>
+                </a:solidFill>
+              </a:defRPr>
+            </a:pPr>
+            <a:r>
+              <a:t>• Secondary candidates expose nearest phonetic and kinematic neighbors.</a:t>
+            </a:r>
+          </a:p>
+          <a:p>
+            <a:pPr>
+              <a:defRPr sz="1100">
+                <a:solidFill>
+                  <a:srgbClr val="94A3B8"/>
+                </a:solidFill>
+              </a:defRPr>
+            </a:pPr>
+            <a:r>
+              <a:t>• Prevents ambiguous gesture acceptance when confidence falls below 65%.</a:t>
+            </a:r>
+          </a:p>
+          <a:p>
+            <a:pPr>
+              <a:defRPr sz="1100">
+                <a:solidFill>
+                  <a:srgbClr val="94A3B8"/>
+                </a:solidFill>
+              </a:defRPr>
+            </a:pPr>
+            <a:r>
+              <a:t>• Allows users to inspect alternative interpretations during complex fingerspelling.</a:t>
+            </a:r>
+          </a:p>
+        </p:txBody>
+      </p:sp>
+    </p:spTree>
+  </p:cSld>
+  <p:clrMapOvr>
+    <a:masterClrMapping/>
+  </p:clrMapOvr>
+</p:sld>
+</file>
+
+<file path=ppt/slides/slide9.xml><?xml version="1.0" encoding="utf-8"?>
+<p:sld xmlns:a="http://schemas.openxmlformats.org/drawingml/2006/main" xmlns:p="http://schemas.openxmlformats.org/presentationml/2006/main" xmlns:r="http://schemas.openxmlformats.org/officeDocument/2006/relationships">
+  <p:cSld>
+    <p:spTree>
+      <p:nvGrpSpPr>
+        <p:cNvPr id="1" name=""/>
+        <p:cNvGrpSpPr/>
+        <p:nvPr/>
+      </p:nvGrpSpPr>
+      <p:grpSpPr/>
+      <p:sp>
+        <p:nvSpPr>
+          <p:cNvPr id="2" name="Rectangle 1"/>
+          <p:cNvSpPr/>
+          <p:nvPr/>
+        </p:nvSpPr>
+        <p:spPr>
+          <a:xfrm>
+            <a:off x="0" y="0"/>
+            <a:ext cx="12191695" cy="6858000"/>
+          </a:xfrm>
+          <a:prstGeom prst="rect">
+            <a:avLst/>
+          </a:prstGeom>
+          <a:solidFill>
+            <a:srgbClr val="070D18"/>
+          </a:solidFill>
+          <a:ln>
+            <a:noFill/>
+          </a:ln>
+        </p:spPr>
+        <p:style>
+          <a:lnRef idx="1">
+            <a:schemeClr val="accent1"/>
+          </a:lnRef>
+          <a:fillRef idx="3">
+            <a:schemeClr val="accent1"/>
+          </a:fillRef>
+          <a:effectRef idx="2">
+            <a:schemeClr val="accent1"/>
+          </a:effectRef>
+          <a:fontRef idx="minor">
+            <a:schemeClr val="lt1"/>
+          </a:fontRef>
+        </p:style>
+        <p:txBody>
+          <a:bodyPr rtlCol="0" anchor="ctr"/>
+          <a:lstStyle/>
+          <a:p>
+            <a:pPr algn="ctr"/>
+          </a:p>
+        </p:txBody>
+      </p:sp>
+      <p:sp>
+        <p:nvSpPr>
+          <p:cNvPr id="3" name="TextBox 2"/>
+          <p:cNvSpPr txBox="1"/>
+          <p:nvPr/>
+        </p:nvSpPr>
+        <p:spPr>
+          <a:xfrm>
+            <a:off x="731520" y="365760"/>
+            <a:ext cx="10698480" cy="1005840"/>
+          </a:xfrm>
+          <a:prstGeom prst="rect">
+            <a:avLst/>
+          </a:prstGeom>
+          <a:noFill/>
+        </p:spPr>
+        <p:txBody>
+          <a:bodyPr wrap="square" lIns="0" tIns="0" rIns="0" bIns="0">
+            <a:spAutoFit/>
+          </a:bodyPr>
+          <a:lstStyle/>
+          <a:p>
+            <a:pPr>
+              <a:defRPr sz="1000" b="1">
+                <a:solidFill>
+                  <a:srgbClr val="06B6D4"/>
+                </a:solidFill>
+              </a:defRPr>
+            </a:pPr>
+            <a:r>
+              <a:t>PROJECT 29 • ACCESSIBILITY &amp; COMPUTER VISION</a:t>
+            </a:r>
+          </a:p>
+          <a:p>
+            <a:pPr>
+              <a:defRPr sz="2200" b="1">
+                <a:solidFill>
+                  <a:srgbClr val="F8FAFC"/>
+                </a:solidFill>
+              </a:defRPr>
+            </a:pPr>
+            <a:r>
+              <a:t>Lexicon Architecture: Conversational Signs &amp; A-Z Fingerspelling</a:t>
+            </a:r>
+          </a:p>
+        </p:txBody>
+      </p:sp>
+      <p:pic>
+        <p:nvPicPr>
+          <p:cNvPr id="4" name="Picture 3" descr="04_alphabet_fingerspelling_palette.png"/>
+          <p:cNvPicPr>
+            <a:picLocks noChangeAspect="1"/>
+          </p:cNvPicPr>
+          <p:nvPr/>
+        </p:nvPicPr>
+        <p:blipFill>
+          <a:blip r:embed="rId2"/>
+          <a:stretch>
+            <a:fillRect/>
+          </a:stretch>
+        </p:blipFill>
+        <p:spPr>
+          <a:xfrm>
+            <a:off x="731520" y="1645920"/>
+            <a:ext cx="5669280" cy="4572000"/>
+          </a:xfrm>
+          <a:prstGeom prst="rect">
+            <a:avLst/>
+          </a:prstGeom>
+        </p:spPr>
+      </p:pic>
+      <p:sp>
+        <p:nvSpPr>
+          <p:cNvPr id="5" name="Rounded Rectangle 4"/>
+          <p:cNvSpPr/>
+          <p:nvPr/>
+        </p:nvSpPr>
+        <p:spPr>
+          <a:xfrm>
+            <a:off x="6675120" y="1645920"/>
+            <a:ext cx="4754880" cy="4572000"/>
+          </a:xfrm>
+          <a:prstGeom prst="roundRect">
+            <a:avLst/>
+          </a:prstGeom>
+          <a:solidFill>
+            <a:srgbClr val="0D182C"/>
+          </a:solidFill>
+          <a:ln w="9525">
+            <a:solidFill>
+              <a:srgbClr val="FFFFFF"/>
+            </a:solidFill>
+          </a:ln>
+        </p:spPr>
+        <p:style>
+          <a:lnRef idx="1">
+            <a:schemeClr val="accent1"/>
+          </a:lnRef>
+          <a:fillRef idx="3">
+            <a:schemeClr val="accent1"/>
+          </a:fillRef>
+          <a:effectRef idx="2">
+            <a:schemeClr val="accent1"/>
+          </a:effectRef>
+          <a:fontRef idx="minor">
+            <a:schemeClr val="lt1"/>
+          </a:fontRef>
+        </p:style>
+        <p:txBody>
+          <a:bodyPr rtlCol="0" anchor="ctr"/>
+          <a:lstStyle/>
+          <a:p>
+            <a:pPr algn="ctr"/>
+          </a:p>
+        </p:txBody>
+      </p:sp>
+      <p:sp>
+        <p:nvSpPr>
+          <p:cNvPr id="6" name="TextBox 5"/>
+          <p:cNvSpPr txBox="1"/>
+          <p:nvPr/>
+        </p:nvSpPr>
+        <p:spPr>
+          <a:xfrm>
+            <a:off x="6903720" y="1828800"/>
+            <a:ext cx="4297680" cy="4206240"/>
+          </a:xfrm>
+          <a:prstGeom prst="rect">
+            <a:avLst/>
+          </a:prstGeom>
+          <a:noFill/>
+        </p:spPr>
+        <p:txBody>
+          <a:bodyPr wrap="square" lIns="0" tIns="0" rIns="0" bIns="0">
+            <a:spAutoFit/>
+          </a:bodyPr>
+          <a:lstStyle/>
+          <a:p>
+            <a:pPr>
+              <a:defRPr sz="1400" b="1">
+                <a:solidFill>
+                  <a:srgbClr val="06B6D4"/>
+                </a:solidFill>
+              </a:defRPr>
+            </a:pPr>
+            <a:r>
+              <a:t>Comprehensive Lexicon Coverage</a:t>
+            </a:r>
+          </a:p>
+          <a:p>
+            <a:pPr>
+              <a:defRPr sz="1100">
+                <a:solidFill>
+                  <a:srgbClr val="94A3B8"/>
+                </a:solidFill>
+              </a:defRPr>
+            </a:pPr>
+            <a:r>
+              <a:t>• 38 total ASL/ISL vocabulary items supported out of the box.</a:t>
+            </a:r>
+          </a:p>
+          <a:p>
+            <a:pPr>
+              <a:defRPr sz="1100">
+                <a:solidFill>
+                  <a:srgbClr val="94A3B8"/>
+                </a:solidFill>
+              </a:defRPr>
+            </a:pPr>
+            <a:r>
+              <a:t>• 12 high-frequency conversational phrases (Greetings, Emergency, Courtesy).</a:t>
+            </a:r>
+          </a:p>
+          <a:p>
+            <a:pPr>
+              <a:defRPr sz="1100">
+                <a:solidFill>
+                  <a:srgbClr val="94A3B8"/>
+                </a:solidFill>
+              </a:defRPr>
+            </a:pPr>
+            <a:r>
+              <a:t>• Complete 26-letter American Sign Language manual alphabet (A through Z).</a:t>
+            </a:r>
+          </a:p>
+          <a:p>
+            <a:pPr>
+              <a:defRPr sz="1100">
+                <a:solidFill>
+                  <a:srgbClr val="94A3B8"/>
+                </a:solidFill>
+              </a:defRPr>
+            </a:pPr>
+            <a:r>
+              <a:t>• Interactive palette triggers kinematic landmark generation and real inference.</a:t>
+            </a:r>
+          </a:p>
+          <a:p>
+            <a:pPr>
+              <a:defRPr sz="1100">
+                <a:solidFill>
+                  <a:srgbClr val="94A3B8"/>
+                </a:solidFill>
+              </a:defRPr>
+            </a:pPr>
+            <a:r>
+              <a:t>• Enables spelling out proper nouns, medical terminology, and medication names.</a:t>
+            </a:r>
+          </a:p>
+          <a:p>
+            <a:pPr>
+              <a:defRPr sz="1100">
+                <a:solidFill>
+                  <a:srgbClr val="94A3B8"/>
+                </a:solidFill>
+              </a:defRPr>
+            </a:pPr>
+            <a:r>
+              <a:t>• System easily extensible to additional regional signs via SQLite vocabulary tables.</a:t>
             </a:r>
           </a:p>
         </p:txBody>
